--- a/outputs/Propuestas_analitica_Distribuidora_Panamericana_campos_completos.pptx
+++ b/outputs/Propuestas_analitica_Distribuidora_Panamericana_campos_completos.pptx
@@ -3711,8 +3711,8 @@
         </p:nvSpPr>
         <p:spPr>
           <a:xfrm>
-            <a:off x="8496300" y="2095500"/>
-            <a:ext cx="495300" cy="266700"/>
+            <a:off x="8458199" y="2095500"/>
+            <a:ext cx="600075" cy="190500"/>
           </a:xfrm>
           <a:prstGeom prst="rect">
             <a:avLst/>
@@ -3735,13 +3735,18 @@
               </a:defRPr>
             </a:pPr>
             <a:r>
-              <a:rPr sz="1125" b="1">
+              <a:rPr sz="1125" b="1" dirty="0" err="1">
                 <a:solidFill>
                   <a:srgbClr val="27643A"/>
                 </a:solidFill>
               </a:rPr>
               <a:t>precio</a:t>
             </a:r>
+            <a:endParaRPr sz="1125" b="1" dirty="0">
+              <a:solidFill>
+                <a:srgbClr val="27643A"/>
+              </a:solidFill>
+            </a:endParaRPr>
           </a:p>
         </p:txBody>
       </p:sp>

--- a/outputs/Propuestas_analitica_Distribuidora_Panamericana_campos_completos.pptx
+++ b/outputs/Propuestas_analitica_Distribuidora_Panamericana_campos_completos.pptx
@@ -5,12 +5,14 @@
     <p:sldMasterId id="2147483648" r:id="rId1"/>
   </p:sldMasterIdLst>
   <p:notesMasterIdLst>
-    <p:notesMasterId r:id="rId5"/>
+    <p:notesMasterId r:id="rId7"/>
   </p:notesMasterIdLst>
   <p:sldIdLst>
     <p:sldId id="256" r:id="rId2"/>
     <p:sldId id="257" r:id="rId3"/>
-    <p:sldId id="258" r:id="rId4"/>
+    <p:sldId id="259" r:id="rId4"/>
+    <p:sldId id="258" r:id="rId5"/>
+    <p:sldId id="260" r:id="rId6"/>
   </p:sldIdLst>
   <p:sldSz cx="12192000" cy="6858000"/>
   <p:notesSz cx="6858000" cy="9144000"/>
@@ -506,6 +508,166 @@
         </p:txBody>
       </p:sp>
     </p:spTree>
+    <p:extLst>
+      <p:ext uri="{BB962C8B-B14F-4D97-AF65-F5344CB8AC3E}">
+        <p14:creationId xmlns:p14="http://schemas.microsoft.com/office/powerpoint/2010/main" val="1277377524"/>
+      </p:ext>
+    </p:extLst>
+  </p:cSld>
+  <p:clrMapOvr>
+    <a:masterClrMapping/>
+  </p:clrMapOvr>
+</p:notes>
+</file>
+
+<file path=ppt/notesSlides/notesSlide4.xml><?xml version="1.0" encoding="utf-8"?>
+<p:notes xmlns:a="http://schemas.openxmlformats.org/drawingml/2006/main" xmlns:r="http://schemas.openxmlformats.org/officeDocument/2006/relationships" xmlns:p="http://schemas.openxmlformats.org/presentationml/2006/main">
+  <p:cSld>
+    <p:spTree>
+      <p:nvGrpSpPr>
+        <p:cNvPr id="1" name=""/>
+        <p:cNvGrpSpPr/>
+        <p:nvPr/>
+      </p:nvGrpSpPr>
+      <p:grpSpPr>
+        <a:xfrm>
+          <a:off x="0" y="0"/>
+          <a:ext cx="0" cy="0"/>
+          <a:chOff x="0" y="0"/>
+          <a:chExt cx="0" cy="0"/>
+        </a:xfrm>
+      </p:grpSpPr>
+      <p:sp>
+        <p:nvSpPr>
+          <p:cNvPr id="2" name="Slide Image Placeholder 1"/>
+          <p:cNvSpPr>
+            <a:spLocks noGrp="1" noRot="1" noChangeAspect="1"/>
+          </p:cNvSpPr>
+          <p:nvPr>
+            <p:ph type="sldImg"/>
+          </p:nvPr>
+        </p:nvSpPr>
+        <p:spPr/>
+      </p:sp>
+      <p:sp>
+        <p:nvSpPr>
+          <p:cNvPr id="3" name="Notes Placeholder 2"/>
+          <p:cNvSpPr>
+            <a:spLocks noGrp="1"/>
+          </p:cNvSpPr>
+          <p:nvPr>
+            <p:ph type="body" idx="1"/>
+          </p:nvPr>
+        </p:nvSpPr>
+        <p:spPr/>
+        <p:txBody>
+          <a:bodyPr/>
+          <a:lstStyle/>
+          <a:p>
+            <a:endParaRPr/>
+          </a:p>
+        </p:txBody>
+      </p:sp>
+      <p:sp>
+        <p:nvSpPr>
+          <p:cNvPr id="4" name="Slide Number Placeholder 3"/>
+          <p:cNvSpPr>
+            <a:spLocks noGrp="1"/>
+          </p:cNvSpPr>
+          <p:nvPr>
+            <p:ph type="sldNum" idx="5"/>
+          </p:nvPr>
+        </p:nvSpPr>
+        <p:spPr/>
+        <p:txBody>
+          <a:bodyPr/>
+          <a:lstStyle/>
+          <a:p>
+            <a:endParaRPr/>
+          </a:p>
+        </p:txBody>
+      </p:sp>
+    </p:spTree>
+  </p:cSld>
+  <p:clrMapOvr>
+    <a:masterClrMapping/>
+  </p:clrMapOvr>
+</p:notes>
+</file>
+
+<file path=ppt/notesSlides/notesSlide5.xml><?xml version="1.0" encoding="utf-8"?>
+<p:notes xmlns:a="http://schemas.openxmlformats.org/drawingml/2006/main" xmlns:r="http://schemas.openxmlformats.org/officeDocument/2006/relationships" xmlns:p="http://schemas.openxmlformats.org/presentationml/2006/main">
+  <p:cSld>
+    <p:spTree>
+      <p:nvGrpSpPr>
+        <p:cNvPr id="1" name=""/>
+        <p:cNvGrpSpPr/>
+        <p:nvPr/>
+      </p:nvGrpSpPr>
+      <p:grpSpPr>
+        <a:xfrm>
+          <a:off x="0" y="0"/>
+          <a:ext cx="0" cy="0"/>
+          <a:chOff x="0" y="0"/>
+          <a:chExt cx="0" cy="0"/>
+        </a:xfrm>
+      </p:grpSpPr>
+      <p:sp>
+        <p:nvSpPr>
+          <p:cNvPr id="2" name="Slide Image Placeholder 1"/>
+          <p:cNvSpPr>
+            <a:spLocks noGrp="1" noRot="1" noChangeAspect="1"/>
+          </p:cNvSpPr>
+          <p:nvPr>
+            <p:ph type="sldImg"/>
+          </p:nvPr>
+        </p:nvSpPr>
+        <p:spPr/>
+      </p:sp>
+      <p:sp>
+        <p:nvSpPr>
+          <p:cNvPr id="3" name="Notes Placeholder 2"/>
+          <p:cNvSpPr>
+            <a:spLocks noGrp="1"/>
+          </p:cNvSpPr>
+          <p:nvPr>
+            <p:ph type="body" idx="1"/>
+          </p:nvPr>
+        </p:nvSpPr>
+        <p:spPr/>
+        <p:txBody>
+          <a:bodyPr/>
+          <a:lstStyle/>
+          <a:p>
+            <a:endParaRPr/>
+          </a:p>
+        </p:txBody>
+      </p:sp>
+      <p:sp>
+        <p:nvSpPr>
+          <p:cNvPr id="4" name="Slide Number Placeholder 3"/>
+          <p:cNvSpPr>
+            <a:spLocks noGrp="1"/>
+          </p:cNvSpPr>
+          <p:nvPr>
+            <p:ph type="sldNum" idx="5"/>
+          </p:nvPr>
+        </p:nvSpPr>
+        <p:spPr/>
+        <p:txBody>
+          <a:bodyPr/>
+          <a:lstStyle/>
+          <a:p>
+            <a:endParaRPr/>
+          </a:p>
+        </p:txBody>
+      </p:sp>
+    </p:spTree>
+    <p:extLst>
+      <p:ext uri="{BB962C8B-B14F-4D97-AF65-F5344CB8AC3E}">
+        <p14:creationId xmlns:p14="http://schemas.microsoft.com/office/powerpoint/2010/main" val="3507173115"/>
+      </p:ext>
+    </p:extLst>
   </p:cSld>
   <p:clrMapOvr>
     <a:masterClrMapping/>
@@ -1421,13 +1583,98 @@
               </a:defRPr>
             </a:pPr>
             <a:r>
-              <a:rPr sz="2625" b="1">
+              <a:rPr sz="2625" b="1" dirty="0" err="1">
                 <a:solidFill>
                   <a:srgbClr val="12356B"/>
                 </a:solidFill>
               </a:rPr>
-              <a:t>Predecir qué pedidos tienen riesgo de cancelación</a:t>
-            </a:r>
+              <a:t>Predecir</a:t>
+            </a:r>
+            <a:r>
+              <a:rPr sz="2625" b="1" dirty="0">
+                <a:solidFill>
+                  <a:srgbClr val="12356B"/>
+                </a:solidFill>
+              </a:rPr>
+              <a:t> </a:t>
+            </a:r>
+            <a:r>
+              <a:rPr sz="2625" b="1" dirty="0" err="1">
+                <a:solidFill>
+                  <a:srgbClr val="12356B"/>
+                </a:solidFill>
+              </a:rPr>
+              <a:t>qué</a:t>
+            </a:r>
+            <a:r>
+              <a:rPr sz="2625" b="1" dirty="0">
+                <a:solidFill>
+                  <a:srgbClr val="12356B"/>
+                </a:solidFill>
+              </a:rPr>
+              <a:t> </a:t>
+            </a:r>
+            <a:r>
+              <a:rPr sz="2625" b="1" dirty="0" err="1">
+                <a:solidFill>
+                  <a:srgbClr val="12356B"/>
+                </a:solidFill>
+              </a:rPr>
+              <a:t>pedidos</a:t>
+            </a:r>
+            <a:r>
+              <a:rPr sz="2625" b="1" dirty="0">
+                <a:solidFill>
+                  <a:srgbClr val="12356B"/>
+                </a:solidFill>
+              </a:rPr>
+              <a:t> </a:t>
+            </a:r>
+            <a:r>
+              <a:rPr sz="2625" b="1" dirty="0" err="1">
+                <a:solidFill>
+                  <a:srgbClr val="12356B"/>
+                </a:solidFill>
+              </a:rPr>
+              <a:t>tienen</a:t>
+            </a:r>
+            <a:r>
+              <a:rPr sz="2625" b="1" dirty="0">
+                <a:solidFill>
+                  <a:srgbClr val="12356B"/>
+                </a:solidFill>
+              </a:rPr>
+              <a:t> </a:t>
+            </a:r>
+            <a:r>
+              <a:rPr sz="2625" b="1" dirty="0" err="1">
+                <a:solidFill>
+                  <a:srgbClr val="12356B"/>
+                </a:solidFill>
+              </a:rPr>
+              <a:t>riesgo</a:t>
+            </a:r>
+            <a:r>
+              <a:rPr sz="2625" b="1" dirty="0">
+                <a:solidFill>
+                  <a:srgbClr val="12356B"/>
+                </a:solidFill>
+              </a:rPr>
+              <a:t> de </a:t>
+            </a:r>
+            <a:r>
+              <a:rPr sz="2625" b="1" dirty="0" err="1">
+                <a:solidFill>
+                  <a:srgbClr val="12356B"/>
+                </a:solidFill>
+              </a:rPr>
+              <a:t>cancelación</a:t>
+            </a:r>
+            <a:endParaRPr sz="2625" b="1" dirty="0">
+              <a:solidFill>
+                <a:srgbClr val="12356B"/>
+              </a:solidFill>
+            </a:endParaRPr>
           </a:p>
         </p:txBody>
       </p:sp>
@@ -1497,7 +1744,7 @@
         </p:nvSpPr>
         <p:spPr>
           <a:xfrm>
-            <a:off x="323850" y="1066800"/>
+            <a:off x="323850" y="1074420"/>
             <a:ext cx="4762500" cy="4857750"/>
           </a:xfrm>
           <a:prstGeom prst="roundRect">
@@ -1761,7 +2008,7 @@
               </a:defRPr>
             </a:pPr>
             <a:r>
-              <a:rPr sz="638" b="0" dirty="0">
+              <a:rPr sz="900" b="0" dirty="0">
                 <a:solidFill>
                   <a:srgbClr val="1F2937"/>
                 </a:solidFill>
@@ -1778,14 +2025,14 @@
               </a:defRPr>
             </a:pPr>
             <a:r>
-              <a:rPr sz="638" b="0" dirty="0" err="1">
+              <a:rPr sz="900" b="0" dirty="0" err="1">
                 <a:solidFill>
                   <a:srgbClr val="1F2937"/>
                 </a:solidFill>
               </a:rPr>
               <a:t>nombre</a:t>
             </a:r>
-            <a:endParaRPr sz="638" b="0" dirty="0">
+            <a:endParaRPr sz="900" b="0" dirty="0">
               <a:solidFill>
                 <a:srgbClr val="1F2937"/>
               </a:solidFill>
@@ -1800,7 +2047,7 @@
               </a:defRPr>
             </a:pPr>
             <a:r>
-              <a:rPr sz="638" b="0" dirty="0">
+              <a:rPr sz="900" b="0" dirty="0">
                 <a:solidFill>
                   <a:srgbClr val="1F2937"/>
                 </a:solidFill>
@@ -1817,7 +2064,7 @@
               </a:defRPr>
             </a:pPr>
             <a:r>
-              <a:rPr sz="638" b="0" dirty="0">
+              <a:rPr sz="900" b="0" dirty="0">
                 <a:solidFill>
                   <a:srgbClr val="1F2937"/>
                 </a:solidFill>
@@ -1834,7 +2081,7 @@
               </a:defRPr>
             </a:pPr>
             <a:r>
-              <a:rPr sz="638" b="0" dirty="0">
+              <a:rPr sz="900" b="0" dirty="0">
                 <a:solidFill>
                   <a:srgbClr val="1F2937"/>
                 </a:solidFill>
@@ -1851,7 +2098,7 @@
               </a:defRPr>
             </a:pPr>
             <a:r>
-              <a:rPr sz="638" b="0" dirty="0">
+              <a:rPr sz="900" b="0" dirty="0">
                 <a:solidFill>
                   <a:srgbClr val="1F2937"/>
                 </a:solidFill>
@@ -1868,7 +2115,7 @@
               </a:defRPr>
             </a:pPr>
             <a:r>
-              <a:rPr sz="638" b="0" dirty="0">
+              <a:rPr sz="900" b="0" dirty="0">
                 <a:solidFill>
                   <a:srgbClr val="1F2937"/>
                 </a:solidFill>
@@ -1885,14 +2132,14 @@
               </a:defRPr>
             </a:pPr>
             <a:r>
-              <a:rPr sz="638" b="0" dirty="0" err="1">
+              <a:rPr sz="900" b="0" dirty="0" err="1">
                 <a:solidFill>
                   <a:srgbClr val="1F2937"/>
                 </a:solidFill>
               </a:rPr>
               <a:t>telefono</a:t>
             </a:r>
-            <a:endParaRPr sz="638" b="0" dirty="0">
+            <a:endParaRPr sz="900" b="0" dirty="0">
               <a:solidFill>
                 <a:srgbClr val="1F2937"/>
               </a:solidFill>
@@ -1907,64 +2154,20 @@
               </a:defRPr>
             </a:pPr>
             <a:r>
-              <a:rPr sz="638" b="0" dirty="0" err="1">
-                <a:solidFill>
-                  <a:srgbClr val="1F2937"/>
-                </a:solidFill>
-              </a:rPr>
-              <a:t>preguntaSecreta</a:t>
-            </a:r>
-            <a:endParaRPr sz="638" b="0" dirty="0">
+              <a:rPr sz="900" b="0" dirty="0" err="1">
+                <a:solidFill>
+                  <a:srgbClr val="1F2937"/>
+                </a:solidFill>
+              </a:rPr>
+              <a:t>rol</a:t>
+            </a:r>
+            <a:endParaRPr lang="es-MX" sz="900" b="0" dirty="0">
               <a:solidFill>
                 <a:srgbClr val="1F2937"/>
               </a:solidFill>
             </a:endParaRPr>
           </a:p>
           <a:p>
-            <a:pPr algn="l">
-              <a:defRPr sz="638" b="0">
-                <a:solidFill>
-                  <a:srgbClr val="1F2937"/>
-                </a:solidFill>
-              </a:defRPr>
-            </a:pPr>
-            <a:r>
-              <a:rPr sz="638" b="0" dirty="0" err="1">
-                <a:solidFill>
-                  <a:srgbClr val="1F2937"/>
-                </a:solidFill>
-              </a:rPr>
-              <a:t>respuestaSecreta</a:t>
-            </a:r>
-            <a:endParaRPr sz="638" b="0" dirty="0">
-              <a:solidFill>
-                <a:srgbClr val="1F2937"/>
-              </a:solidFill>
-            </a:endParaRPr>
-          </a:p>
-          <a:p>
-            <a:pPr algn="l">
-              <a:defRPr sz="638" b="0">
-                <a:solidFill>
-                  <a:srgbClr val="1F2937"/>
-                </a:solidFill>
-              </a:defRPr>
-            </a:pPr>
-            <a:r>
-              <a:rPr sz="638" b="0" dirty="0" err="1">
-                <a:solidFill>
-                  <a:srgbClr val="1F2937"/>
-                </a:solidFill>
-              </a:rPr>
-              <a:t>rol</a:t>
-            </a:r>
-            <a:endParaRPr lang="es-MX" sz="638" b="0" dirty="0">
-              <a:solidFill>
-                <a:srgbClr val="1F2937"/>
-              </a:solidFill>
-            </a:endParaRPr>
-          </a:p>
-          <a:p>
             <a:pPr>
               <a:defRPr sz="638" b="0">
                 <a:solidFill>
@@ -1973,7 +2176,7 @@
               </a:defRPr>
             </a:pPr>
             <a:r>
-              <a:rPr lang="es-MX" sz="638" dirty="0">
+              <a:rPr lang="es-MX" sz="900" dirty="0">
                 <a:solidFill>
                   <a:srgbClr val="1F2937"/>
                 </a:solidFill>
@@ -1981,14 +2184,14 @@
               <a:t>direcciones[]</a:t>
             </a:r>
             <a:br>
-              <a:rPr lang="es-MX" sz="638" dirty="0">
+              <a:rPr lang="es-MX" sz="900" dirty="0">
                 <a:solidFill>
                   <a:srgbClr val="1F2937"/>
                 </a:solidFill>
               </a:rPr>
             </a:br>
             <a:r>
-              <a:rPr lang="es-MX" sz="638" b="0" dirty="0" err="1">
+              <a:rPr lang="es-MX" sz="900" b="0" dirty="0" err="1">
                 <a:solidFill>
                   <a:srgbClr val="1F2937"/>
                 </a:solidFill>
@@ -1996,7 +2199,7 @@
               <a:t>activeTokens</a:t>
             </a:r>
             <a:r>
-              <a:rPr lang="es-MX" sz="638" b="0" dirty="0">
+              <a:rPr lang="es-MX" sz="900" b="0" dirty="0">
                 <a:solidFill>
                   <a:srgbClr val="1F2937"/>
                 </a:solidFill>
@@ -2187,7 +2390,7 @@
               </a:defRPr>
             </a:pPr>
             <a:r>
-              <a:rPr sz="638" b="0" dirty="0">
+              <a:rPr sz="1000" b="0" dirty="0">
                 <a:solidFill>
                   <a:srgbClr val="1F2937"/>
                 </a:solidFill>
@@ -2204,7 +2407,7 @@
               </a:defRPr>
             </a:pPr>
             <a:r>
-              <a:rPr sz="638" b="0" dirty="0" err="1">
+              <a:rPr sz="1000" b="0" dirty="0" err="1">
                 <a:solidFill>
                   <a:srgbClr val="1F2937"/>
                 </a:solidFill>
@@ -2212,7 +2415,7 @@
               <a:t>usuario</a:t>
             </a:r>
             <a:r>
-              <a:rPr sz="638" b="0" dirty="0">
+              <a:rPr sz="1000" b="0" dirty="0">
                 <a:solidFill>
                   <a:srgbClr val="1F2937"/>
                 </a:solidFill>
@@ -2229,7 +2432,7 @@
               </a:defRPr>
             </a:pPr>
             <a:r>
-              <a:rPr sz="638" b="0" dirty="0" err="1">
+              <a:rPr sz="1000" b="0" dirty="0" err="1">
                 <a:solidFill>
                   <a:srgbClr val="1F2937"/>
                 </a:solidFill>
@@ -2237,7 +2440,7 @@
               <a:t>productos</a:t>
             </a:r>
             <a:r>
-              <a:rPr sz="638" b="0" dirty="0">
+              <a:rPr sz="1000" b="0" dirty="0">
                 <a:solidFill>
                   <a:srgbClr val="1F2937"/>
                 </a:solidFill>
@@ -2254,14 +2457,14 @@
               </a:defRPr>
             </a:pPr>
             <a:r>
-              <a:rPr sz="638" b="0" dirty="0" err="1">
+              <a:rPr sz="1000" b="0" dirty="0" err="1">
                 <a:solidFill>
                   <a:srgbClr val="1F2937"/>
                 </a:solidFill>
               </a:rPr>
               <a:t>metodoPago</a:t>
             </a:r>
-            <a:endParaRPr sz="638" b="0" dirty="0">
+            <a:endParaRPr sz="1000" b="0" dirty="0">
               <a:solidFill>
                 <a:srgbClr val="1F2937"/>
               </a:solidFill>
@@ -2276,7 +2479,7 @@
               </a:defRPr>
             </a:pPr>
             <a:r>
-              <a:rPr lang="es-MX" sz="638" dirty="0">
+              <a:rPr lang="es-MX" sz="1000" dirty="0">
                 <a:solidFill>
                   <a:srgbClr val="1F2937"/>
                 </a:solidFill>
@@ -2284,14 +2487,14 @@
               <a:t>total</a:t>
             </a:r>
             <a:br>
-              <a:rPr lang="es-MX" sz="638" b="0" dirty="0">
+              <a:rPr lang="es-MX" sz="1000" b="0" dirty="0">
                 <a:solidFill>
                   <a:srgbClr val="1F2937"/>
                 </a:solidFill>
               </a:rPr>
             </a:br>
             <a:r>
-              <a:rPr lang="es-MX" sz="638" b="0" dirty="0">
+              <a:rPr lang="es-MX" sz="1000" b="0" dirty="0">
                 <a:solidFill>
                   <a:srgbClr val="1F2937"/>
                 </a:solidFill>
@@ -2308,14 +2511,14 @@
               </a:defRPr>
             </a:pPr>
             <a:r>
-              <a:rPr lang="es-MX" sz="638" b="0" dirty="0" err="1">
+              <a:rPr lang="es-MX" sz="1000" b="0" dirty="0" err="1">
                 <a:solidFill>
                   <a:srgbClr val="1F2937"/>
                 </a:solidFill>
               </a:rPr>
               <a:t>costoEnvio</a:t>
             </a:r>
-            <a:endParaRPr lang="es-MX" sz="638" b="0" dirty="0">
+            <a:endParaRPr lang="es-MX" sz="1000" b="0" dirty="0">
               <a:solidFill>
                 <a:srgbClr val="1F2937"/>
               </a:solidFill>
@@ -2330,14 +2533,14 @@
               </a:defRPr>
             </a:pPr>
             <a:r>
-              <a:rPr lang="es-MX" sz="638" b="0" dirty="0" err="1">
+              <a:rPr lang="es-MX" sz="1000" b="0" dirty="0" err="1">
                 <a:solidFill>
                   <a:srgbClr val="1F2937"/>
                 </a:solidFill>
               </a:rPr>
               <a:t>inventarioReservado</a:t>
             </a:r>
-            <a:endParaRPr lang="es-MX" sz="638" b="0" dirty="0">
+            <a:endParaRPr lang="es-MX" sz="1000" b="0" dirty="0">
               <a:solidFill>
                 <a:srgbClr val="1F2937"/>
               </a:solidFill>
@@ -2352,7 +2555,7 @@
               </a:defRPr>
             </a:pPr>
             <a:r>
-              <a:rPr lang="es-MX" sz="638" b="0" dirty="0">
+              <a:rPr lang="es-MX" sz="1000" b="0" dirty="0">
                 <a:solidFill>
                   <a:srgbClr val="1F2937"/>
                 </a:solidFill>
@@ -2369,14 +2572,14 @@
               </a:defRPr>
             </a:pPr>
             <a:r>
-              <a:rPr lang="es-MX" sz="638" b="0" dirty="0" err="1">
+              <a:rPr lang="es-MX" sz="1000" b="0" dirty="0" err="1">
                 <a:solidFill>
                   <a:srgbClr val="1F2937"/>
                 </a:solidFill>
               </a:rPr>
               <a:t>createdAt</a:t>
             </a:r>
-            <a:endParaRPr lang="es-MX" sz="638" b="0" dirty="0">
+            <a:endParaRPr lang="es-MX" sz="1000" b="0" dirty="0">
               <a:solidFill>
                 <a:srgbClr val="1F2937"/>
               </a:solidFill>
@@ -2391,14 +2594,14 @@
               </a:defRPr>
             </a:pPr>
             <a:r>
-              <a:rPr lang="es-MX" sz="638" b="0" dirty="0" err="1">
+              <a:rPr lang="es-MX" sz="1000" b="0" dirty="0" err="1">
                 <a:solidFill>
                   <a:srgbClr val="1F2937"/>
                 </a:solidFill>
               </a:rPr>
               <a:t>updatedAt</a:t>
             </a:r>
-            <a:endParaRPr lang="es-MX" sz="638" b="0" dirty="0">
+            <a:endParaRPr lang="es-MX" sz="1000" b="0" dirty="0">
               <a:solidFill>
                 <a:srgbClr val="1F2937"/>
               </a:solidFill>
@@ -2517,7 +2720,7 @@
         <p:spPr>
           <a:xfrm>
             <a:off x="781050" y="4381500"/>
-            <a:ext cx="3848100" cy="1257300"/>
+            <a:ext cx="3848100" cy="1333500"/>
           </a:xfrm>
           <a:prstGeom prst="roundRect">
             <a:avLst>
@@ -2660,7 +2863,7 @@
               </a:defRPr>
             </a:pPr>
             <a:r>
-              <a:rPr sz="638" b="0">
+              <a:rPr sz="700" b="0" dirty="0">
                 <a:solidFill>
                   <a:srgbClr val="1F2937"/>
                 </a:solidFill>
@@ -2677,13 +2880,18 @@
               </a:defRPr>
             </a:pPr>
             <a:r>
-              <a:rPr sz="638" b="0">
+              <a:rPr sz="700" b="0" dirty="0" err="1">
                 <a:solidFill>
                   <a:srgbClr val="1F2937"/>
                 </a:solidFill>
               </a:rPr>
               <a:t>nombre</a:t>
             </a:r>
+            <a:endParaRPr sz="700" b="0" dirty="0">
+              <a:solidFill>
+                <a:srgbClr val="1F2937"/>
+              </a:solidFill>
+            </a:endParaRPr>
           </a:p>
           <a:p>
             <a:pPr algn="l">
@@ -2694,13 +2902,18 @@
               </a:defRPr>
             </a:pPr>
             <a:r>
-              <a:rPr sz="638" b="0">
+              <a:rPr sz="700" b="0" dirty="0" err="1">
                 <a:solidFill>
                   <a:srgbClr val="1F2937"/>
                 </a:solidFill>
               </a:rPr>
               <a:t>descripcion</a:t>
             </a:r>
+            <a:endParaRPr sz="700" b="0" dirty="0">
+              <a:solidFill>
+                <a:srgbClr val="1F2937"/>
+              </a:solidFill>
+            </a:endParaRPr>
           </a:p>
           <a:p>
             <a:pPr algn="l">
@@ -2711,13 +2924,18 @@
               </a:defRPr>
             </a:pPr>
             <a:r>
-              <a:rPr sz="638" b="0">
+              <a:rPr sz="700" b="0" dirty="0" err="1">
                 <a:solidFill>
                   <a:srgbClr val="1F2937"/>
                 </a:solidFill>
               </a:rPr>
               <a:t>precioNormal</a:t>
             </a:r>
+            <a:endParaRPr sz="700" b="0" dirty="0">
+              <a:solidFill>
+                <a:srgbClr val="1F2937"/>
+              </a:solidFill>
+            </a:endParaRPr>
           </a:p>
           <a:p>
             <a:pPr algn="l">
@@ -2728,13 +2946,18 @@
               </a:defRPr>
             </a:pPr>
             <a:r>
-              <a:rPr sz="638" b="0">
+              <a:rPr sz="700" b="0" dirty="0" err="1">
                 <a:solidFill>
                   <a:srgbClr val="1F2937"/>
                 </a:solidFill>
               </a:rPr>
               <a:t>skuNormal</a:t>
             </a:r>
+            <a:endParaRPr sz="700" b="0" dirty="0">
+              <a:solidFill>
+                <a:srgbClr val="1F2937"/>
+              </a:solidFill>
+            </a:endParaRPr>
           </a:p>
           <a:p>
             <a:pPr algn="l">
@@ -2745,13 +2968,18 @@
               </a:defRPr>
             </a:pPr>
             <a:r>
-              <a:rPr sz="638" b="0">
+              <a:rPr sz="700" b="0" dirty="0" err="1">
                 <a:solidFill>
                   <a:srgbClr val="1F2937"/>
                 </a:solidFill>
               </a:rPr>
               <a:t>precioMayoreo</a:t>
             </a:r>
+            <a:endParaRPr sz="700" b="0" dirty="0">
+              <a:solidFill>
+                <a:srgbClr val="1F2937"/>
+              </a:solidFill>
+            </a:endParaRPr>
           </a:p>
           <a:p>
             <a:pPr algn="l">
@@ -2762,13 +2990,18 @@
               </a:defRPr>
             </a:pPr>
             <a:r>
-              <a:rPr sz="638" b="0">
+              <a:rPr sz="700" b="0" dirty="0" err="1">
                 <a:solidFill>
                   <a:srgbClr val="1F2937"/>
                 </a:solidFill>
               </a:rPr>
               <a:t>skuMayoreo</a:t>
             </a:r>
+            <a:endParaRPr sz="700" b="0" dirty="0">
+              <a:solidFill>
+                <a:srgbClr val="1F2937"/>
+              </a:solidFill>
+            </a:endParaRPr>
           </a:p>
           <a:p>
             <a:pPr algn="l">
@@ -2779,13 +3012,18 @@
               </a:defRPr>
             </a:pPr>
             <a:r>
-              <a:rPr sz="638" b="0">
+              <a:rPr sz="700" b="0" dirty="0" err="1">
                 <a:solidFill>
                   <a:srgbClr val="1F2937"/>
                 </a:solidFill>
               </a:rPr>
               <a:t>precioCaja</a:t>
             </a:r>
+            <a:endParaRPr sz="700" b="0" dirty="0">
+              <a:solidFill>
+                <a:srgbClr val="1F2937"/>
+              </a:solidFill>
+            </a:endParaRPr>
           </a:p>
           <a:p>
             <a:pPr algn="l">
@@ -2796,13 +3034,18 @@
               </a:defRPr>
             </a:pPr>
             <a:r>
-              <a:rPr sz="638" b="0">
+              <a:rPr sz="700" b="0" dirty="0" err="1">
                 <a:solidFill>
                   <a:srgbClr val="1F2937"/>
                 </a:solidFill>
               </a:rPr>
               <a:t>skuCaja</a:t>
             </a:r>
+            <a:endParaRPr sz="700" b="0" dirty="0">
+              <a:solidFill>
+                <a:srgbClr val="1F2937"/>
+              </a:solidFill>
+            </a:endParaRPr>
           </a:p>
         </p:txBody>
       </p:sp>
@@ -2846,7 +3089,7 @@
               </a:defRPr>
             </a:pPr>
             <a:r>
-              <a:rPr sz="638" b="0">
+              <a:rPr sz="700" b="0" dirty="0">
                 <a:solidFill>
                   <a:srgbClr val="1F2937"/>
                 </a:solidFill>
@@ -2863,12 +3106,20 @@
               </a:defRPr>
             </a:pPr>
             <a:r>
-              <a:rPr sz="638" b="0">
-                <a:solidFill>
-                  <a:srgbClr val="1F2937"/>
-                </a:solidFill>
-              </a:rPr>
-              <a:t>marca · FK</a:t>
+              <a:rPr sz="700" b="0" dirty="0" err="1">
+                <a:solidFill>
+                  <a:srgbClr val="1F2937"/>
+                </a:solidFill>
+              </a:rPr>
+              <a:t>marca</a:t>
+            </a:r>
+            <a:r>
+              <a:rPr sz="700" b="0" dirty="0">
+                <a:solidFill>
+                  <a:srgbClr val="1F2937"/>
+                </a:solidFill>
+              </a:rPr>
+              <a:t> · FK</a:t>
             </a:r>
           </a:p>
           <a:p>
@@ -2880,12 +3131,20 @@
               </a:defRPr>
             </a:pPr>
             <a:r>
-              <a:rPr sz="638" b="0">
-                <a:solidFill>
-                  <a:srgbClr val="1F2937"/>
-                </a:solidFill>
-              </a:rPr>
-              <a:t>familia · FK</a:t>
+              <a:rPr sz="700" b="0" dirty="0" err="1">
+                <a:solidFill>
+                  <a:srgbClr val="1F2937"/>
+                </a:solidFill>
+              </a:rPr>
+              <a:t>familia</a:t>
+            </a:r>
+            <a:r>
+              <a:rPr sz="700" b="0" dirty="0">
+                <a:solidFill>
+                  <a:srgbClr val="1F2937"/>
+                </a:solidFill>
+              </a:rPr>
+              <a:t> · FK</a:t>
             </a:r>
           </a:p>
           <a:p>
@@ -2897,13 +3156,18 @@
               </a:defRPr>
             </a:pPr>
             <a:r>
-              <a:rPr sz="638" b="0">
+              <a:rPr sz="700" b="0" dirty="0" err="1">
                 <a:solidFill>
                   <a:srgbClr val="1F2937"/>
                 </a:solidFill>
               </a:rPr>
               <a:t>activo</a:t>
             </a:r>
+            <a:endParaRPr sz="700" b="0" dirty="0">
+              <a:solidFill>
+                <a:srgbClr val="1F2937"/>
+              </a:solidFill>
+            </a:endParaRPr>
           </a:p>
           <a:p>
             <a:pPr algn="l">
@@ -2914,13 +3178,18 @@
               </a:defRPr>
             </a:pPr>
             <a:r>
-              <a:rPr sz="638" b="0">
+              <a:rPr sz="700" b="0" dirty="0" err="1">
                 <a:solidFill>
                   <a:srgbClr val="1F2937"/>
                 </a:solidFill>
               </a:rPr>
               <a:t>imagenUrl</a:t>
             </a:r>
+            <a:endParaRPr sz="700" b="0" dirty="0">
+              <a:solidFill>
+                <a:srgbClr val="1F2937"/>
+              </a:solidFill>
+            </a:endParaRPr>
           </a:p>
           <a:p>
             <a:pPr algn="l">
@@ -2931,13 +3200,18 @@
               </a:defRPr>
             </a:pPr>
             <a:r>
-              <a:rPr sz="638" b="0">
+              <a:rPr sz="700" b="0" dirty="0" err="1">
                 <a:solidFill>
                   <a:srgbClr val="1F2937"/>
                 </a:solidFill>
               </a:rPr>
               <a:t>createdAt</a:t>
             </a:r>
+            <a:endParaRPr sz="700" b="0" dirty="0">
+              <a:solidFill>
+                <a:srgbClr val="1F2937"/>
+              </a:solidFill>
+            </a:endParaRPr>
           </a:p>
           <a:p>
             <a:pPr algn="l">
@@ -2948,13 +3222,18 @@
               </a:defRPr>
             </a:pPr>
             <a:r>
-              <a:rPr sz="638" b="0">
+              <a:rPr sz="700" b="0" dirty="0" err="1">
                 <a:solidFill>
                   <a:srgbClr val="1F2937"/>
                 </a:solidFill>
               </a:rPr>
               <a:t>updatedAt</a:t>
             </a:r>
+            <a:endParaRPr sz="700" b="0" dirty="0">
+              <a:solidFill>
+                <a:srgbClr val="1F2937"/>
+              </a:solidFill>
+            </a:endParaRPr>
           </a:p>
           <a:p>
             <a:pPr algn="l">
@@ -2965,7 +3244,7 @@
               </a:defRPr>
             </a:pPr>
             <a:r>
-              <a:rPr sz="638" b="0">
+              <a:rPr sz="700" b="0" dirty="0">
                 <a:solidFill>
                   <a:srgbClr val="1F2937"/>
                 </a:solidFill>
@@ -3010,91 +3289,6 @@
       </p:sp>
       <p:sp>
         <p:nvSpPr>
-          <p:cNvPr id="25" name="cls-keys-legend">
-            <a:extLst>
-              <a:ext uri="{FF2B5EF4-FFF2-40B4-BE49-F238E27FC236}">
-                <a16:creationId xmlns:a16="http://schemas.microsoft.com/office/drawing/2014/main" id="{3DDD0BD1-E3C9-43CF-A7E5-FDBA03017401}"/>
-              </a:ext>
-            </a:extLst>
-          </p:cNvPr>
-          <p:cNvSpPr>
-            <a:spLocks noGrp="1"/>
-          </p:cNvSpPr>
-          <p:nvPr/>
-        </p:nvSpPr>
-        <p:spPr>
-          <a:xfrm>
-            <a:off x="781050" y="5695950"/>
-            <a:ext cx="3848100" cy="171450"/>
-          </a:xfrm>
-          <a:prstGeom prst="roundRect">
-            <a:avLst>
-              <a:gd name="adj" fmla="val 11111"/>
-            </a:avLst>
-          </a:prstGeom>
-          <a:solidFill>
-            <a:srgbClr val="F2F6FC"/>
-          </a:solidFill>
-          <a:ln w="9525">
-            <a:solidFill>
-              <a:srgbClr val="7FA0D8"/>
-            </a:solidFill>
-            <a:prstDash val="solid"/>
-          </a:ln>
-        </p:spPr>
-      </p:sp>
-      <p:sp>
-        <p:nvSpPr>
-          <p:cNvPr id="26" name="cls-keys-legend-text">
-            <a:extLst>
-              <a:ext uri="{FF2B5EF4-FFF2-40B4-BE49-F238E27FC236}">
-                <a16:creationId xmlns:a16="http://schemas.microsoft.com/office/drawing/2014/main" id="{EA698A87-37A4-464E-8F93-226EECDF678E}"/>
-              </a:ext>
-            </a:extLst>
-          </p:cNvPr>
-          <p:cNvSpPr>
-            <a:spLocks noGrp="1"/>
-          </p:cNvSpPr>
-          <p:nvPr/>
-        </p:nvSpPr>
-        <p:spPr>
-          <a:xfrm>
-            <a:off x="838200" y="5715000"/>
-            <a:ext cx="3733800" cy="133350"/>
-          </a:xfrm>
-          <a:prstGeom prst="rect">
-            <a:avLst/>
-          </a:prstGeom>
-          <a:noFill/>
-          <a:ln w="0">
-            <a:noFill/>
-            <a:prstDash val="solid"/>
-          </a:ln>
-        </p:spPr>
-        <p:txBody>
-          <a:bodyPr/>
-          <a:lstStyle/>
-          <a:p>
-            <a:pPr algn="ctr">
-              <a:defRPr sz="750" b="1">
-                <a:solidFill>
-                  <a:srgbClr val="12356B"/>
-                </a:solidFill>
-              </a:defRPr>
-            </a:pPr>
-            <a:r>
-              <a:rPr sz="750" b="1">
-                <a:solidFill>
-                  <a:srgbClr val="12356B"/>
-                </a:solidFill>
-              </a:rPr>
-              <a:t>PK: _id   ·   FK: ObjectId   ·   [ ]: arreglo   ·   ↳: campo anidado</a:t>
-            </a:r>
-          </a:p>
-        </p:txBody>
-      </p:sp>
-      <p:sp>
-        <p:nvSpPr>
           <p:cNvPr id="27" name="cls-flow-arrow">
             <a:extLst>
               <a:ext uri="{FF2B5EF4-FFF2-40B4-BE49-F238E27FC236}">
@@ -3209,7 +3403,7 @@
         </p:nvSpPr>
         <p:spPr>
           <a:xfrm>
-            <a:off x="6191250" y="1066800"/>
+            <a:off x="6257925" y="1095375"/>
             <a:ext cx="5667375" cy="4857750"/>
           </a:xfrm>
           <a:prstGeom prst="roundRect">
@@ -3429,7 +3623,7 @@
         </p:nvSpPr>
         <p:spPr>
           <a:xfrm>
-            <a:off x="6477000" y="2038350"/>
+            <a:off x="7315200" y="2042160"/>
             <a:ext cx="704850" cy="361950"/>
           </a:xfrm>
           <a:prstGeom prst="rect">
@@ -3462,7 +3656,7 @@
         </p:nvSpPr>
         <p:spPr>
           <a:xfrm>
-            <a:off x="6515100" y="2095500"/>
+            <a:off x="7353300" y="2099310"/>
             <a:ext cx="628650" cy="266700"/>
           </a:xfrm>
           <a:prstGeom prst="rect">
@@ -3486,7 +3680,7 @@
               </a:defRPr>
             </a:pPr>
             <a:r>
-              <a:rPr sz="1125" b="1">
+              <a:rPr sz="1100" b="1">
                 <a:solidFill>
                   <a:srgbClr val="27643A"/>
                 </a:solidFill>
@@ -3512,7 +3706,7 @@
         </p:nvSpPr>
         <p:spPr>
           <a:xfrm>
-            <a:off x="7181850" y="2038350"/>
+            <a:off x="8020050" y="2042160"/>
             <a:ext cx="723900" cy="361950"/>
           </a:xfrm>
           <a:prstGeom prst="rect">
@@ -3545,7 +3739,7 @@
         </p:nvSpPr>
         <p:spPr>
           <a:xfrm>
-            <a:off x="7219950" y="2095500"/>
+            <a:off x="8058150" y="2099310"/>
             <a:ext cx="647700" cy="266700"/>
           </a:xfrm>
           <a:prstGeom prst="rect">
@@ -3569,13 +3763,26 @@
               </a:defRPr>
             </a:pPr>
             <a:r>
-              <a:rPr sz="1125" b="1">
+              <a:rPr sz="1100" b="1" dirty="0">
                 <a:solidFill>
                   <a:srgbClr val="27643A"/>
                 </a:solidFill>
               </a:rPr>
-              <a:t>prod.</a:t>
-            </a:r>
+              <a:t>p</a:t>
+            </a:r>
+            <a:r>
+              <a:rPr lang="es-MX" sz="1100" b="1" dirty="0" err="1">
+                <a:solidFill>
+                  <a:srgbClr val="27643A"/>
+                </a:solidFill>
+              </a:rPr>
+              <a:t>edi</a:t>
+            </a:r>
+            <a:endParaRPr sz="1100" b="1" dirty="0">
+              <a:solidFill>
+                <a:srgbClr val="27643A"/>
+              </a:solidFill>
+            </a:endParaRPr>
           </a:p>
         </p:txBody>
       </p:sp>
@@ -3595,7 +3802,7 @@
         </p:nvSpPr>
         <p:spPr>
           <a:xfrm>
-            <a:off x="7905750" y="2038350"/>
+            <a:off x="8743950" y="2042160"/>
             <a:ext cx="552450" cy="361950"/>
           </a:xfrm>
           <a:prstGeom prst="rect">
@@ -3628,7 +3835,7 @@
         </p:nvSpPr>
         <p:spPr>
           <a:xfrm>
-            <a:off x="7943850" y="2095500"/>
+            <a:off x="8782050" y="2099310"/>
             <a:ext cx="476250" cy="266700"/>
           </a:xfrm>
           <a:prstGeom prst="rect">
@@ -3652,7 +3859,7 @@
               </a:defRPr>
             </a:pPr>
             <a:r>
-              <a:rPr sz="1125" b="1">
+              <a:rPr sz="1100" b="1">
                 <a:solidFill>
                   <a:srgbClr val="27643A"/>
                 </a:solidFill>
@@ -3664,22 +3871,22 @@
       </p:sp>
       <p:sp>
         <p:nvSpPr>
-          <p:cNvPr id="40" name="cls-table-header-3">
-            <a:extLst>
-              <a:ext uri="{FF2B5EF4-FFF2-40B4-BE49-F238E27FC236}">
-                <a16:creationId xmlns:a16="http://schemas.microsoft.com/office/drawing/2014/main" id="{5046DABC-3A69-44D0-872F-9FA0EA29CA34}"/>
-              </a:ext>
-            </a:extLst>
-          </p:cNvPr>
-          <p:cNvSpPr>
-            <a:spLocks noGrp="1"/>
-          </p:cNvSpPr>
-          <p:nvPr/>
-        </p:nvSpPr>
-        <p:spPr>
-          <a:xfrm>
-            <a:off x="8458200" y="2038350"/>
-            <a:ext cx="571500" cy="361950"/>
+          <p:cNvPr id="42" name="cls-table-header-4">
+            <a:extLst>
+              <a:ext uri="{FF2B5EF4-FFF2-40B4-BE49-F238E27FC236}">
+                <a16:creationId xmlns:a16="http://schemas.microsoft.com/office/drawing/2014/main" id="{C051D039-7B99-4C03-8E46-24A2C97A5A02}"/>
+              </a:ext>
+            </a:extLst>
+          </p:cNvPr>
+          <p:cNvSpPr>
+            <a:spLocks noGrp="1"/>
+          </p:cNvSpPr>
+          <p:nvPr/>
+        </p:nvSpPr>
+        <p:spPr>
+          <a:xfrm>
+            <a:off x="9286875" y="2042160"/>
+            <a:ext cx="609600" cy="361950"/>
           </a:xfrm>
           <a:prstGeom prst="rect">
             <a:avLst/>
@@ -3697,22 +3904,22 @@
       </p:sp>
       <p:sp>
         <p:nvSpPr>
-          <p:cNvPr id="41" name="cls-table-header-text-3">
-            <a:extLst>
-              <a:ext uri="{FF2B5EF4-FFF2-40B4-BE49-F238E27FC236}">
-                <a16:creationId xmlns:a16="http://schemas.microsoft.com/office/drawing/2014/main" id="{A2950422-CAB5-4B3F-B4B4-D8B36B74F2DC}"/>
-              </a:ext>
-            </a:extLst>
-          </p:cNvPr>
-          <p:cNvSpPr>
-            <a:spLocks noGrp="1"/>
-          </p:cNvSpPr>
-          <p:nvPr/>
-        </p:nvSpPr>
-        <p:spPr>
-          <a:xfrm>
-            <a:off x="8458199" y="2095500"/>
-            <a:ext cx="600075" cy="190500"/>
+          <p:cNvPr id="43" name="cls-table-header-text-4">
+            <a:extLst>
+              <a:ext uri="{FF2B5EF4-FFF2-40B4-BE49-F238E27FC236}">
+                <a16:creationId xmlns:a16="http://schemas.microsoft.com/office/drawing/2014/main" id="{1D033EE2-E033-4430-9EE4-36B0E1E8CA17}"/>
+              </a:ext>
+            </a:extLst>
+          </p:cNvPr>
+          <p:cNvSpPr>
+            <a:spLocks noGrp="1"/>
+          </p:cNvSpPr>
+          <p:nvPr/>
+        </p:nvSpPr>
+        <p:spPr>
+          <a:xfrm>
+            <a:off x="9324975" y="2099310"/>
+            <a:ext cx="533400" cy="266700"/>
           </a:xfrm>
           <a:prstGeom prst="rect">
             <a:avLst/>
@@ -3735,39 +3942,34 @@
               </a:defRPr>
             </a:pPr>
             <a:r>
-              <a:rPr sz="1125" b="1" dirty="0" err="1">
+              <a:rPr sz="1100" b="1">
                 <a:solidFill>
                   <a:srgbClr val="27643A"/>
                 </a:solidFill>
               </a:rPr>
-              <a:t>precio</a:t>
-            </a:r>
-            <a:endParaRPr sz="1125" b="1" dirty="0">
-              <a:solidFill>
-                <a:srgbClr val="27643A"/>
-              </a:solidFill>
-            </a:endParaRPr>
-          </a:p>
-        </p:txBody>
-      </p:sp>
-      <p:sp>
-        <p:nvSpPr>
-          <p:cNvPr id="42" name="cls-table-header-4">
-            <a:extLst>
-              <a:ext uri="{FF2B5EF4-FFF2-40B4-BE49-F238E27FC236}">
-                <a16:creationId xmlns:a16="http://schemas.microsoft.com/office/drawing/2014/main" id="{C051D039-7B99-4C03-8E46-24A2C97A5A02}"/>
-              </a:ext>
-            </a:extLst>
-          </p:cNvPr>
-          <p:cNvSpPr>
-            <a:spLocks noGrp="1"/>
-          </p:cNvSpPr>
-          <p:nvPr/>
-        </p:nvSpPr>
-        <p:spPr>
-          <a:xfrm>
-            <a:off x="9029700" y="2038350"/>
-            <a:ext cx="609600" cy="361950"/>
+              <a:t>total</a:t>
+            </a:r>
+          </a:p>
+        </p:txBody>
+      </p:sp>
+      <p:sp>
+        <p:nvSpPr>
+          <p:cNvPr id="44" name="cls-table-header-5">
+            <a:extLst>
+              <a:ext uri="{FF2B5EF4-FFF2-40B4-BE49-F238E27FC236}">
+                <a16:creationId xmlns:a16="http://schemas.microsoft.com/office/drawing/2014/main" id="{D052822B-ED47-4ECE-BFFB-61C0EFFB4C10}"/>
+              </a:ext>
+            </a:extLst>
+          </p:cNvPr>
+          <p:cNvSpPr>
+            <a:spLocks noGrp="1"/>
+          </p:cNvSpPr>
+          <p:nvPr/>
+        </p:nvSpPr>
+        <p:spPr>
+          <a:xfrm>
+            <a:off x="9896475" y="2042160"/>
+            <a:ext cx="800100" cy="361950"/>
           </a:xfrm>
           <a:prstGeom prst="rect">
             <a:avLst/>
@@ -3785,22 +3987,22 @@
       </p:sp>
       <p:sp>
         <p:nvSpPr>
-          <p:cNvPr id="43" name="cls-table-header-text-4">
-            <a:extLst>
-              <a:ext uri="{FF2B5EF4-FFF2-40B4-BE49-F238E27FC236}">
-                <a16:creationId xmlns:a16="http://schemas.microsoft.com/office/drawing/2014/main" id="{1D033EE2-E033-4430-9EE4-36B0E1E8CA17}"/>
-              </a:ext>
-            </a:extLst>
-          </p:cNvPr>
-          <p:cNvSpPr>
-            <a:spLocks noGrp="1"/>
-          </p:cNvSpPr>
-          <p:nvPr/>
-        </p:nvSpPr>
-        <p:spPr>
-          <a:xfrm>
-            <a:off x="9067800" y="2095500"/>
-            <a:ext cx="533400" cy="266700"/>
+          <p:cNvPr id="45" name="cls-table-header-text-5">
+            <a:extLst>
+              <a:ext uri="{FF2B5EF4-FFF2-40B4-BE49-F238E27FC236}">
+                <a16:creationId xmlns:a16="http://schemas.microsoft.com/office/drawing/2014/main" id="{288EBFA4-5D77-4A48-BB17-7E45FF5EB639}"/>
+              </a:ext>
+            </a:extLst>
+          </p:cNvPr>
+          <p:cNvSpPr>
+            <a:spLocks noGrp="1"/>
+          </p:cNvSpPr>
+          <p:nvPr/>
+        </p:nvSpPr>
+        <p:spPr>
+          <a:xfrm>
+            <a:off x="9934575" y="2099310"/>
+            <a:ext cx="723900" cy="266700"/>
           </a:xfrm>
           <a:prstGeom prst="rect">
             <a:avLst/>
@@ -3823,94 +4025,11 @@
               </a:defRPr>
             </a:pPr>
             <a:r>
-              <a:rPr sz="1125" b="1">
+              <a:rPr sz="1100" b="1">
                 <a:solidFill>
                   <a:srgbClr val="27643A"/>
                 </a:solidFill>
               </a:rPr>
-              <a:t>total</a:t>
-            </a:r>
-          </a:p>
-        </p:txBody>
-      </p:sp>
-      <p:sp>
-        <p:nvSpPr>
-          <p:cNvPr id="44" name="cls-table-header-5">
-            <a:extLst>
-              <a:ext uri="{FF2B5EF4-FFF2-40B4-BE49-F238E27FC236}">
-                <a16:creationId xmlns:a16="http://schemas.microsoft.com/office/drawing/2014/main" id="{D052822B-ED47-4ECE-BFFB-61C0EFFB4C10}"/>
-              </a:ext>
-            </a:extLst>
-          </p:cNvPr>
-          <p:cNvSpPr>
-            <a:spLocks noGrp="1"/>
-          </p:cNvSpPr>
-          <p:nvPr/>
-        </p:nvSpPr>
-        <p:spPr>
-          <a:xfrm>
-            <a:off x="9639300" y="2038350"/>
-            <a:ext cx="800100" cy="361950"/>
-          </a:xfrm>
-          <a:prstGeom prst="rect">
-            <a:avLst/>
-          </a:prstGeom>
-          <a:solidFill>
-            <a:srgbClr val="EAF5EC"/>
-          </a:solidFill>
-          <a:ln w="9525">
-            <a:solidFill>
-              <a:srgbClr val="AEB8C7"/>
-            </a:solidFill>
-            <a:prstDash val="solid"/>
-          </a:ln>
-        </p:spPr>
-      </p:sp>
-      <p:sp>
-        <p:nvSpPr>
-          <p:cNvPr id="45" name="cls-table-header-text-5">
-            <a:extLst>
-              <a:ext uri="{FF2B5EF4-FFF2-40B4-BE49-F238E27FC236}">
-                <a16:creationId xmlns:a16="http://schemas.microsoft.com/office/drawing/2014/main" id="{288EBFA4-5D77-4A48-BB17-7E45FF5EB639}"/>
-              </a:ext>
-            </a:extLst>
-          </p:cNvPr>
-          <p:cNvSpPr>
-            <a:spLocks noGrp="1"/>
-          </p:cNvSpPr>
-          <p:nvPr/>
-        </p:nvSpPr>
-        <p:spPr>
-          <a:xfrm>
-            <a:off x="9677400" y="2095500"/>
-            <a:ext cx="723900" cy="266700"/>
-          </a:xfrm>
-          <a:prstGeom prst="rect">
-            <a:avLst/>
-          </a:prstGeom>
-          <a:noFill/>
-          <a:ln w="0">
-            <a:noFill/>
-            <a:prstDash val="solid"/>
-          </a:ln>
-        </p:spPr>
-        <p:txBody>
-          <a:bodyPr/>
-          <a:lstStyle/>
-          <a:p>
-            <a:pPr algn="ctr">
-              <a:defRPr sz="1125" b="1">
-                <a:solidFill>
-                  <a:srgbClr val="27643A"/>
-                </a:solidFill>
-              </a:defRPr>
-            </a:pPr>
-            <a:r>
-              <a:rPr sz="1125" b="1">
-                <a:solidFill>
-                  <a:srgbClr val="27643A"/>
-                </a:solidFill>
-              </a:rPr>
               <a:t>método</a:t>
             </a:r>
           </a:p>
@@ -3932,7 +4051,7 @@
         </p:nvSpPr>
         <p:spPr>
           <a:xfrm>
-            <a:off x="10439400" y="2038350"/>
+            <a:off x="10696575" y="2042160"/>
             <a:ext cx="819150" cy="361950"/>
           </a:xfrm>
           <a:prstGeom prst="rect">
@@ -3965,7 +4084,7 @@
         </p:nvSpPr>
         <p:spPr>
           <a:xfrm>
-            <a:off x="10477500" y="2095500"/>
+            <a:off x="10734675" y="2099310"/>
             <a:ext cx="742950" cy="266700"/>
           </a:xfrm>
           <a:prstGeom prst="rect">
@@ -3989,7 +4108,7 @@
               </a:defRPr>
             </a:pPr>
             <a:r>
-              <a:rPr sz="1125" b="1">
+              <a:rPr sz="1100" b="1">
                 <a:solidFill>
                   <a:srgbClr val="62318A"/>
                 </a:solidFill>
@@ -4015,7 +4134,7 @@
         </p:nvSpPr>
         <p:spPr>
           <a:xfrm>
-            <a:off x="6477000" y="2400300"/>
+            <a:off x="7315200" y="2404110"/>
             <a:ext cx="704850" cy="361950"/>
           </a:xfrm>
           <a:prstGeom prst="rect">
@@ -4048,7 +4167,7 @@
         </p:nvSpPr>
         <p:spPr>
           <a:xfrm>
-            <a:off x="6505575" y="2466975"/>
+            <a:off x="7343775" y="2470785"/>
             <a:ext cx="647700" cy="257175"/>
           </a:xfrm>
           <a:prstGeom prst="rect">
@@ -4072,7 +4191,7 @@
               </a:defRPr>
             </a:pPr>
             <a:r>
-              <a:rPr sz="1050" b="0">
+              <a:rPr sz="1600" b="0">
                 <a:solidFill>
                   <a:srgbClr val="1F2937"/>
                 </a:solidFill>
@@ -4098,7 +4217,7 @@
         </p:nvSpPr>
         <p:spPr>
           <a:xfrm>
-            <a:off x="7181850" y="2400300"/>
+            <a:off x="8020050" y="2404110"/>
             <a:ext cx="723900" cy="361950"/>
           </a:xfrm>
           <a:prstGeom prst="rect">
@@ -4131,7 +4250,7 @@
         </p:nvSpPr>
         <p:spPr>
           <a:xfrm>
-            <a:off x="7210425" y="2466975"/>
+            <a:off x="8048625" y="2470785"/>
             <a:ext cx="666750" cy="257175"/>
           </a:xfrm>
           <a:prstGeom prst="rect">
@@ -4155,7 +4274,7 @@
               </a:defRPr>
             </a:pPr>
             <a:r>
-              <a:rPr sz="1050" b="0">
+              <a:rPr sz="1600" b="0">
                 <a:solidFill>
                   <a:srgbClr val="1F2937"/>
                 </a:solidFill>
@@ -4181,7 +4300,7 @@
         </p:nvSpPr>
         <p:spPr>
           <a:xfrm>
-            <a:off x="7905750" y="2400300"/>
+            <a:off x="8743950" y="2404110"/>
             <a:ext cx="552450" cy="361950"/>
           </a:xfrm>
           <a:prstGeom prst="rect">
@@ -4214,7 +4333,7 @@
         </p:nvSpPr>
         <p:spPr>
           <a:xfrm>
-            <a:off x="7934325" y="2466975"/>
+            <a:off x="8772525" y="2470785"/>
             <a:ext cx="495300" cy="257175"/>
           </a:xfrm>
           <a:prstGeom prst="rect">
@@ -4238,7 +4357,7 @@
               </a:defRPr>
             </a:pPr>
             <a:r>
-              <a:rPr sz="1050" b="0">
+              <a:rPr sz="1600" b="0">
                 <a:solidFill>
                   <a:srgbClr val="1F2937"/>
                 </a:solidFill>
@@ -4250,22 +4369,22 @@
       </p:sp>
       <p:sp>
         <p:nvSpPr>
-          <p:cNvPr id="54" name="cls-table-cell-0-3">
-            <a:extLst>
-              <a:ext uri="{FF2B5EF4-FFF2-40B4-BE49-F238E27FC236}">
-                <a16:creationId xmlns:a16="http://schemas.microsoft.com/office/drawing/2014/main" id="{3A366D14-0EF0-4C9D-A90F-FAD2BB2924EE}"/>
-              </a:ext>
-            </a:extLst>
-          </p:cNvPr>
-          <p:cNvSpPr>
-            <a:spLocks noGrp="1"/>
-          </p:cNvSpPr>
-          <p:nvPr/>
-        </p:nvSpPr>
-        <p:spPr>
-          <a:xfrm>
-            <a:off x="8458200" y="2400300"/>
-            <a:ext cx="571500" cy="361950"/>
+          <p:cNvPr id="56" name="cls-table-cell-0-4">
+            <a:extLst>
+              <a:ext uri="{FF2B5EF4-FFF2-40B4-BE49-F238E27FC236}">
+                <a16:creationId xmlns:a16="http://schemas.microsoft.com/office/drawing/2014/main" id="{D88988C1-DFB8-4B31-B217-696558470BEB}"/>
+              </a:ext>
+            </a:extLst>
+          </p:cNvPr>
+          <p:cNvSpPr>
+            <a:spLocks noGrp="1"/>
+          </p:cNvSpPr>
+          <p:nvPr/>
+        </p:nvSpPr>
+        <p:spPr>
+          <a:xfrm>
+            <a:off x="9286875" y="2404110"/>
+            <a:ext cx="609600" cy="361950"/>
           </a:xfrm>
           <a:prstGeom prst="rect">
             <a:avLst/>
@@ -4283,22 +4402,22 @@
       </p:sp>
       <p:sp>
         <p:nvSpPr>
-          <p:cNvPr id="55" name="cls-table-cell-text-0-3">
-            <a:extLst>
-              <a:ext uri="{FF2B5EF4-FFF2-40B4-BE49-F238E27FC236}">
-                <a16:creationId xmlns:a16="http://schemas.microsoft.com/office/drawing/2014/main" id="{F23A9F5C-F562-45D9-BAAF-B245DB944C22}"/>
-              </a:ext>
-            </a:extLst>
-          </p:cNvPr>
-          <p:cNvSpPr>
-            <a:spLocks noGrp="1"/>
-          </p:cNvSpPr>
-          <p:nvPr/>
-        </p:nvSpPr>
-        <p:spPr>
-          <a:xfrm>
-            <a:off x="8486775" y="2466975"/>
-            <a:ext cx="514350" cy="257175"/>
+          <p:cNvPr id="57" name="cls-table-cell-text-0-4">
+            <a:extLst>
+              <a:ext uri="{FF2B5EF4-FFF2-40B4-BE49-F238E27FC236}">
+                <a16:creationId xmlns:a16="http://schemas.microsoft.com/office/drawing/2014/main" id="{C210EB00-4A00-43CF-870F-36605E6A69D6}"/>
+              </a:ext>
+            </a:extLst>
+          </p:cNvPr>
+          <p:cNvSpPr>
+            <a:spLocks noGrp="1"/>
+          </p:cNvSpPr>
+          <p:nvPr/>
+        </p:nvSpPr>
+        <p:spPr>
+          <a:xfrm>
+            <a:off x="9315450" y="2470785"/>
+            <a:ext cx="552450" cy="257175"/>
           </a:xfrm>
           <a:prstGeom prst="rect">
             <a:avLst/>
@@ -4321,34 +4440,34 @@
               </a:defRPr>
             </a:pPr>
             <a:r>
-              <a:rPr sz="1050" b="0">
-                <a:solidFill>
-                  <a:srgbClr val="1F2937"/>
-                </a:solidFill>
-              </a:rPr>
-              <a:t>85</a:t>
-            </a:r>
-          </a:p>
-        </p:txBody>
-      </p:sp>
-      <p:sp>
-        <p:nvSpPr>
-          <p:cNvPr id="56" name="cls-table-cell-0-4">
-            <a:extLst>
-              <a:ext uri="{FF2B5EF4-FFF2-40B4-BE49-F238E27FC236}">
-                <a16:creationId xmlns:a16="http://schemas.microsoft.com/office/drawing/2014/main" id="{D88988C1-DFB8-4B31-B217-696558470BEB}"/>
-              </a:ext>
-            </a:extLst>
-          </p:cNvPr>
-          <p:cNvSpPr>
-            <a:spLocks noGrp="1"/>
-          </p:cNvSpPr>
-          <p:nvPr/>
-        </p:nvSpPr>
-        <p:spPr>
-          <a:xfrm>
-            <a:off x="9029700" y="2400300"/>
-            <a:ext cx="609600" cy="361950"/>
+              <a:rPr sz="1600" b="0">
+                <a:solidFill>
+                  <a:srgbClr val="1F2937"/>
+                </a:solidFill>
+              </a:rPr>
+              <a:t>1305</a:t>
+            </a:r>
+          </a:p>
+        </p:txBody>
+      </p:sp>
+      <p:sp>
+        <p:nvSpPr>
+          <p:cNvPr id="58" name="cls-table-cell-0-5">
+            <a:extLst>
+              <a:ext uri="{FF2B5EF4-FFF2-40B4-BE49-F238E27FC236}">
+                <a16:creationId xmlns:a16="http://schemas.microsoft.com/office/drawing/2014/main" id="{0D7D833D-5D7A-472A-8C13-5AD9EB6E5869}"/>
+              </a:ext>
+            </a:extLst>
+          </p:cNvPr>
+          <p:cNvSpPr>
+            <a:spLocks noGrp="1"/>
+          </p:cNvSpPr>
+          <p:nvPr/>
+        </p:nvSpPr>
+        <p:spPr>
+          <a:xfrm>
+            <a:off x="9896475" y="2404110"/>
+            <a:ext cx="800100" cy="361950"/>
           </a:xfrm>
           <a:prstGeom prst="rect">
             <a:avLst/>
@@ -4366,22 +4485,22 @@
       </p:sp>
       <p:sp>
         <p:nvSpPr>
-          <p:cNvPr id="57" name="cls-table-cell-text-0-4">
-            <a:extLst>
-              <a:ext uri="{FF2B5EF4-FFF2-40B4-BE49-F238E27FC236}">
-                <a16:creationId xmlns:a16="http://schemas.microsoft.com/office/drawing/2014/main" id="{C210EB00-4A00-43CF-870F-36605E6A69D6}"/>
-              </a:ext>
-            </a:extLst>
-          </p:cNvPr>
-          <p:cNvSpPr>
-            <a:spLocks noGrp="1"/>
-          </p:cNvSpPr>
-          <p:nvPr/>
-        </p:nvSpPr>
-        <p:spPr>
-          <a:xfrm>
-            <a:off x="9058275" y="2466975"/>
-            <a:ext cx="552450" cy="257175"/>
+          <p:cNvPr id="59" name="cls-table-cell-text-0-5">
+            <a:extLst>
+              <a:ext uri="{FF2B5EF4-FFF2-40B4-BE49-F238E27FC236}">
+                <a16:creationId xmlns:a16="http://schemas.microsoft.com/office/drawing/2014/main" id="{20915C1B-7B0B-490C-BAD9-EAFC6FB85A41}"/>
+              </a:ext>
+            </a:extLst>
+          </p:cNvPr>
+          <p:cNvSpPr>
+            <a:spLocks noGrp="1"/>
+          </p:cNvSpPr>
+          <p:nvPr/>
+        </p:nvSpPr>
+        <p:spPr>
+          <a:xfrm>
+            <a:off x="9925050" y="2470785"/>
+            <a:ext cx="742950" cy="257175"/>
           </a:xfrm>
           <a:prstGeom prst="rect">
             <a:avLst/>
@@ -4404,7 +4523,427 @@
               </a:defRPr>
             </a:pPr>
             <a:r>
-              <a:rPr sz="1050" b="0">
+              <a:rPr lang="es-MX" sz="1600" b="0" dirty="0">
+                <a:solidFill>
+                  <a:srgbClr val="1F2937"/>
+                </a:solidFill>
+              </a:rPr>
+              <a:t>tarjeta</a:t>
+            </a:r>
+            <a:endParaRPr sz="1600" b="0" dirty="0">
+              <a:solidFill>
+                <a:srgbClr val="1F2937"/>
+              </a:solidFill>
+            </a:endParaRPr>
+          </a:p>
+        </p:txBody>
+      </p:sp>
+      <p:sp>
+        <p:nvSpPr>
+          <p:cNvPr id="60" name="cls-table-cell-0-6">
+            <a:extLst>
+              <a:ext uri="{FF2B5EF4-FFF2-40B4-BE49-F238E27FC236}">
+                <a16:creationId xmlns:a16="http://schemas.microsoft.com/office/drawing/2014/main" id="{F6E013BF-E418-4307-9AB6-9A46959EE478}"/>
+              </a:ext>
+            </a:extLst>
+          </p:cNvPr>
+          <p:cNvSpPr>
+            <a:spLocks noGrp="1"/>
+          </p:cNvSpPr>
+          <p:nvPr/>
+        </p:nvSpPr>
+        <p:spPr>
+          <a:xfrm>
+            <a:off x="10696575" y="2404110"/>
+            <a:ext cx="819150" cy="361950"/>
+          </a:xfrm>
+          <a:prstGeom prst="rect">
+            <a:avLst/>
+          </a:prstGeom>
+          <a:solidFill>
+            <a:srgbClr val="FBF7FD"/>
+          </a:solidFill>
+          <a:ln w="9525">
+            <a:solidFill>
+              <a:srgbClr val="AEB8C7"/>
+            </a:solidFill>
+            <a:prstDash val="solid"/>
+          </a:ln>
+        </p:spPr>
+      </p:sp>
+      <p:sp>
+        <p:nvSpPr>
+          <p:cNvPr id="61" name="cls-table-cell-text-0-6">
+            <a:extLst>
+              <a:ext uri="{FF2B5EF4-FFF2-40B4-BE49-F238E27FC236}">
+                <a16:creationId xmlns:a16="http://schemas.microsoft.com/office/drawing/2014/main" id="{2DFE4335-944B-4DD8-A015-B4F6C066108E}"/>
+              </a:ext>
+            </a:extLst>
+          </p:cNvPr>
+          <p:cNvSpPr>
+            <a:spLocks noGrp="1"/>
+          </p:cNvSpPr>
+          <p:nvPr/>
+        </p:nvSpPr>
+        <p:spPr>
+          <a:xfrm>
+            <a:off x="10725150" y="2470785"/>
+            <a:ext cx="762000" cy="257175"/>
+          </a:xfrm>
+          <a:prstGeom prst="rect">
+            <a:avLst/>
+          </a:prstGeom>
+          <a:noFill/>
+          <a:ln w="0">
+            <a:noFill/>
+            <a:prstDash val="solid"/>
+          </a:ln>
+        </p:spPr>
+        <p:txBody>
+          <a:bodyPr/>
+          <a:lstStyle/>
+          <a:p>
+            <a:pPr algn="ctr">
+              <a:defRPr sz="1050" b="0">
+                <a:solidFill>
+                  <a:srgbClr val="1F2937"/>
+                </a:solidFill>
+              </a:defRPr>
+            </a:pPr>
+            <a:r>
+              <a:rPr sz="1600" b="0">
+                <a:solidFill>
+                  <a:srgbClr val="1F2937"/>
+                </a:solidFill>
+              </a:rPr>
+              <a:t>0</a:t>
+            </a:r>
+          </a:p>
+        </p:txBody>
+      </p:sp>
+      <p:sp>
+        <p:nvSpPr>
+          <p:cNvPr id="62" name="cls-table-cell-1-0">
+            <a:extLst>
+              <a:ext uri="{FF2B5EF4-FFF2-40B4-BE49-F238E27FC236}">
+                <a16:creationId xmlns:a16="http://schemas.microsoft.com/office/drawing/2014/main" id="{56C0B7C2-6797-45CB-9E81-D5CF57918F44}"/>
+              </a:ext>
+            </a:extLst>
+          </p:cNvPr>
+          <p:cNvSpPr>
+            <a:spLocks noGrp="1"/>
+          </p:cNvSpPr>
+          <p:nvPr/>
+        </p:nvSpPr>
+        <p:spPr>
+          <a:xfrm>
+            <a:off x="7315200" y="2766060"/>
+            <a:ext cx="704850" cy="361950"/>
+          </a:xfrm>
+          <a:prstGeom prst="rect">
+            <a:avLst/>
+          </a:prstGeom>
+          <a:solidFill>
+            <a:srgbClr val="F7FAF7"/>
+          </a:solidFill>
+          <a:ln w="9525">
+            <a:solidFill>
+              <a:srgbClr val="AEB8C7"/>
+            </a:solidFill>
+            <a:prstDash val="solid"/>
+          </a:ln>
+        </p:spPr>
+      </p:sp>
+      <p:sp>
+        <p:nvSpPr>
+          <p:cNvPr id="63" name="cls-table-cell-text-1-0">
+            <a:extLst>
+              <a:ext uri="{FF2B5EF4-FFF2-40B4-BE49-F238E27FC236}">
+                <a16:creationId xmlns:a16="http://schemas.microsoft.com/office/drawing/2014/main" id="{132A26B1-3A84-461F-A452-1796A1ADD7E6}"/>
+              </a:ext>
+            </a:extLst>
+          </p:cNvPr>
+          <p:cNvSpPr>
+            <a:spLocks noGrp="1"/>
+          </p:cNvSpPr>
+          <p:nvPr/>
+        </p:nvSpPr>
+        <p:spPr>
+          <a:xfrm>
+            <a:off x="7343775" y="2832735"/>
+            <a:ext cx="647700" cy="257175"/>
+          </a:xfrm>
+          <a:prstGeom prst="rect">
+            <a:avLst/>
+          </a:prstGeom>
+          <a:noFill/>
+          <a:ln w="0">
+            <a:noFill/>
+            <a:prstDash val="solid"/>
+          </a:ln>
+        </p:spPr>
+        <p:txBody>
+          <a:bodyPr/>
+          <a:lstStyle/>
+          <a:p>
+            <a:pPr algn="ctr">
+              <a:defRPr sz="1050" b="0">
+                <a:solidFill>
+                  <a:srgbClr val="1F2937"/>
+                </a:solidFill>
+              </a:defRPr>
+            </a:pPr>
+            <a:r>
+              <a:rPr sz="1600" b="0">
+                <a:solidFill>
+                  <a:srgbClr val="1F2937"/>
+                </a:solidFill>
+              </a:rPr>
+              <a:t>U001</a:t>
+            </a:r>
+          </a:p>
+        </p:txBody>
+      </p:sp>
+      <p:sp>
+        <p:nvSpPr>
+          <p:cNvPr id="64" name="cls-table-cell-1-1">
+            <a:extLst>
+              <a:ext uri="{FF2B5EF4-FFF2-40B4-BE49-F238E27FC236}">
+                <a16:creationId xmlns:a16="http://schemas.microsoft.com/office/drawing/2014/main" id="{8B0380C8-6D7A-4067-8432-0E7C4FB528DE}"/>
+              </a:ext>
+            </a:extLst>
+          </p:cNvPr>
+          <p:cNvSpPr>
+            <a:spLocks noGrp="1"/>
+          </p:cNvSpPr>
+          <p:nvPr/>
+        </p:nvSpPr>
+        <p:spPr>
+          <a:xfrm>
+            <a:off x="8020050" y="2766060"/>
+            <a:ext cx="723900" cy="361950"/>
+          </a:xfrm>
+          <a:prstGeom prst="rect">
+            <a:avLst/>
+          </a:prstGeom>
+          <a:solidFill>
+            <a:srgbClr val="F7FAF7"/>
+          </a:solidFill>
+          <a:ln w="9525">
+            <a:solidFill>
+              <a:srgbClr val="AEB8C7"/>
+            </a:solidFill>
+            <a:prstDash val="solid"/>
+          </a:ln>
+        </p:spPr>
+      </p:sp>
+      <p:sp>
+        <p:nvSpPr>
+          <p:cNvPr id="65" name="cls-table-cell-text-1-1">
+            <a:extLst>
+              <a:ext uri="{FF2B5EF4-FFF2-40B4-BE49-F238E27FC236}">
+                <a16:creationId xmlns:a16="http://schemas.microsoft.com/office/drawing/2014/main" id="{7935CD24-6403-4F55-B225-642D3889A5F9}"/>
+              </a:ext>
+            </a:extLst>
+          </p:cNvPr>
+          <p:cNvSpPr>
+            <a:spLocks noGrp="1"/>
+          </p:cNvSpPr>
+          <p:nvPr/>
+        </p:nvSpPr>
+        <p:spPr>
+          <a:xfrm>
+            <a:off x="8048625" y="2832735"/>
+            <a:ext cx="666750" cy="257175"/>
+          </a:xfrm>
+          <a:prstGeom prst="rect">
+            <a:avLst/>
+          </a:prstGeom>
+          <a:noFill/>
+          <a:ln w="0">
+            <a:noFill/>
+            <a:prstDash val="solid"/>
+          </a:ln>
+        </p:spPr>
+        <p:txBody>
+          <a:bodyPr/>
+          <a:lstStyle/>
+          <a:p>
+            <a:pPr algn="ctr">
+              <a:defRPr sz="1050" b="0">
+                <a:solidFill>
+                  <a:srgbClr val="1F2937"/>
+                </a:solidFill>
+              </a:defRPr>
+            </a:pPr>
+            <a:r>
+              <a:rPr sz="1600" b="0">
+                <a:solidFill>
+                  <a:srgbClr val="1F2937"/>
+                </a:solidFill>
+              </a:rPr>
+              <a:t>P004</a:t>
+            </a:r>
+          </a:p>
+        </p:txBody>
+      </p:sp>
+      <p:sp>
+        <p:nvSpPr>
+          <p:cNvPr id="66" name="cls-table-cell-1-2">
+            <a:extLst>
+              <a:ext uri="{FF2B5EF4-FFF2-40B4-BE49-F238E27FC236}">
+                <a16:creationId xmlns:a16="http://schemas.microsoft.com/office/drawing/2014/main" id="{3E688AE0-6911-46B6-BF33-5B630C02644A}"/>
+              </a:ext>
+            </a:extLst>
+          </p:cNvPr>
+          <p:cNvSpPr>
+            <a:spLocks noGrp="1"/>
+          </p:cNvSpPr>
+          <p:nvPr/>
+        </p:nvSpPr>
+        <p:spPr>
+          <a:xfrm>
+            <a:off x="8743950" y="2766060"/>
+            <a:ext cx="552450" cy="361950"/>
+          </a:xfrm>
+          <a:prstGeom prst="rect">
+            <a:avLst/>
+          </a:prstGeom>
+          <a:solidFill>
+            <a:srgbClr val="F7FAF7"/>
+          </a:solidFill>
+          <a:ln w="9525">
+            <a:solidFill>
+              <a:srgbClr val="AEB8C7"/>
+            </a:solidFill>
+            <a:prstDash val="solid"/>
+          </a:ln>
+        </p:spPr>
+      </p:sp>
+      <p:sp>
+        <p:nvSpPr>
+          <p:cNvPr id="67" name="cls-table-cell-text-1-2">
+            <a:extLst>
+              <a:ext uri="{FF2B5EF4-FFF2-40B4-BE49-F238E27FC236}">
+                <a16:creationId xmlns:a16="http://schemas.microsoft.com/office/drawing/2014/main" id="{255E8F59-C665-4579-966A-5D9CEF316BEA}"/>
+              </a:ext>
+            </a:extLst>
+          </p:cNvPr>
+          <p:cNvSpPr>
+            <a:spLocks noGrp="1"/>
+          </p:cNvSpPr>
+          <p:nvPr/>
+        </p:nvSpPr>
+        <p:spPr>
+          <a:xfrm>
+            <a:off x="8772525" y="2832735"/>
+            <a:ext cx="495300" cy="257175"/>
+          </a:xfrm>
+          <a:prstGeom prst="rect">
+            <a:avLst/>
+          </a:prstGeom>
+          <a:noFill/>
+          <a:ln w="0">
+            <a:noFill/>
+            <a:prstDash val="solid"/>
+          </a:ln>
+        </p:spPr>
+        <p:txBody>
+          <a:bodyPr/>
+          <a:lstStyle/>
+          <a:p>
+            <a:pPr algn="ctr">
+              <a:defRPr sz="1050" b="0">
+                <a:solidFill>
+                  <a:srgbClr val="1F2937"/>
+                </a:solidFill>
+              </a:defRPr>
+            </a:pPr>
+            <a:r>
+              <a:rPr sz="1600" b="0">
+                <a:solidFill>
+                  <a:srgbClr val="1F2937"/>
+                </a:solidFill>
+              </a:rPr>
+              <a:t>7</a:t>
+            </a:r>
+          </a:p>
+        </p:txBody>
+      </p:sp>
+      <p:sp>
+        <p:nvSpPr>
+          <p:cNvPr id="70" name="cls-table-cell-1-4">
+            <a:extLst>
+              <a:ext uri="{FF2B5EF4-FFF2-40B4-BE49-F238E27FC236}">
+                <a16:creationId xmlns:a16="http://schemas.microsoft.com/office/drawing/2014/main" id="{8A350935-6AF3-4E0B-994B-3182F278C3BE}"/>
+              </a:ext>
+            </a:extLst>
+          </p:cNvPr>
+          <p:cNvSpPr>
+            <a:spLocks noGrp="1"/>
+          </p:cNvSpPr>
+          <p:nvPr/>
+        </p:nvSpPr>
+        <p:spPr>
+          <a:xfrm>
+            <a:off x="9286875" y="2766060"/>
+            <a:ext cx="609600" cy="361950"/>
+          </a:xfrm>
+          <a:prstGeom prst="rect">
+            <a:avLst/>
+          </a:prstGeom>
+          <a:solidFill>
+            <a:srgbClr val="F7FAF7"/>
+          </a:solidFill>
+          <a:ln w="9525">
+            <a:solidFill>
+              <a:srgbClr val="AEB8C7"/>
+            </a:solidFill>
+            <a:prstDash val="solid"/>
+          </a:ln>
+        </p:spPr>
+      </p:sp>
+      <p:sp>
+        <p:nvSpPr>
+          <p:cNvPr id="71" name="cls-table-cell-text-1-4">
+            <a:extLst>
+              <a:ext uri="{FF2B5EF4-FFF2-40B4-BE49-F238E27FC236}">
+                <a16:creationId xmlns:a16="http://schemas.microsoft.com/office/drawing/2014/main" id="{6F0BF1AE-8863-47A8-8250-DE9193FDEEAC}"/>
+              </a:ext>
+            </a:extLst>
+          </p:cNvPr>
+          <p:cNvSpPr>
+            <a:spLocks noGrp="1"/>
+          </p:cNvSpPr>
+          <p:nvPr/>
+        </p:nvSpPr>
+        <p:spPr>
+          <a:xfrm>
+            <a:off x="9315450" y="2832735"/>
+            <a:ext cx="552450" cy="257175"/>
+          </a:xfrm>
+          <a:prstGeom prst="rect">
+            <a:avLst/>
+          </a:prstGeom>
+          <a:noFill/>
+          <a:ln w="0">
+            <a:noFill/>
+            <a:prstDash val="solid"/>
+          </a:ln>
+        </p:spPr>
+        <p:txBody>
+          <a:bodyPr/>
+          <a:lstStyle/>
+          <a:p>
+            <a:pPr algn="ctr">
+              <a:defRPr sz="1050" b="0">
+                <a:solidFill>
+                  <a:srgbClr val="1F2937"/>
+                </a:solidFill>
+              </a:defRPr>
+            </a:pPr>
+            <a:r>
+              <a:rPr sz="1600" b="0">
                 <a:solidFill>
                   <a:srgbClr val="1F2937"/>
                 </a:solidFill>
@@ -4416,22 +4955,193 @@
       </p:sp>
       <p:sp>
         <p:nvSpPr>
-          <p:cNvPr id="58" name="cls-table-cell-0-5">
-            <a:extLst>
-              <a:ext uri="{FF2B5EF4-FFF2-40B4-BE49-F238E27FC236}">
-                <a16:creationId xmlns:a16="http://schemas.microsoft.com/office/drawing/2014/main" id="{0D7D833D-5D7A-472A-8C13-5AD9EB6E5869}"/>
-              </a:ext>
-            </a:extLst>
-          </p:cNvPr>
-          <p:cNvSpPr>
-            <a:spLocks noGrp="1"/>
-          </p:cNvSpPr>
-          <p:nvPr/>
-        </p:nvSpPr>
-        <p:spPr>
-          <a:xfrm>
-            <a:off x="9639300" y="2400300"/>
+          <p:cNvPr id="72" name="cls-table-cell-1-5">
+            <a:extLst>
+              <a:ext uri="{FF2B5EF4-FFF2-40B4-BE49-F238E27FC236}">
+                <a16:creationId xmlns:a16="http://schemas.microsoft.com/office/drawing/2014/main" id="{DA34A230-E01E-4819-982B-635E1F8EA529}"/>
+              </a:ext>
+            </a:extLst>
+          </p:cNvPr>
+          <p:cNvSpPr>
+            <a:spLocks noGrp="1"/>
+          </p:cNvSpPr>
+          <p:nvPr/>
+        </p:nvSpPr>
+        <p:spPr>
+          <a:xfrm>
+            <a:off x="9896475" y="2766060"/>
             <a:ext cx="800100" cy="361950"/>
+          </a:xfrm>
+          <a:prstGeom prst="rect">
+            <a:avLst/>
+          </a:prstGeom>
+          <a:solidFill>
+            <a:srgbClr val="F7FAF7"/>
+          </a:solidFill>
+          <a:ln w="9525">
+            <a:solidFill>
+              <a:srgbClr val="AEB8C7"/>
+            </a:solidFill>
+            <a:prstDash val="solid"/>
+          </a:ln>
+        </p:spPr>
+      </p:sp>
+      <p:sp>
+        <p:nvSpPr>
+          <p:cNvPr id="73" name="cls-table-cell-text-1-5">
+            <a:extLst>
+              <a:ext uri="{FF2B5EF4-FFF2-40B4-BE49-F238E27FC236}">
+                <a16:creationId xmlns:a16="http://schemas.microsoft.com/office/drawing/2014/main" id="{32E46FE5-C922-4FE3-AA7A-CA4F4F261BDF}"/>
+              </a:ext>
+            </a:extLst>
+          </p:cNvPr>
+          <p:cNvSpPr>
+            <a:spLocks noGrp="1"/>
+          </p:cNvSpPr>
+          <p:nvPr/>
+        </p:nvSpPr>
+        <p:spPr>
+          <a:xfrm>
+            <a:off x="9925050" y="2832735"/>
+            <a:ext cx="742950" cy="257175"/>
+          </a:xfrm>
+          <a:prstGeom prst="rect">
+            <a:avLst/>
+          </a:prstGeom>
+          <a:noFill/>
+          <a:ln w="0">
+            <a:noFill/>
+            <a:prstDash val="solid"/>
+          </a:ln>
+        </p:spPr>
+        <p:txBody>
+          <a:bodyPr/>
+          <a:lstStyle/>
+          <a:p>
+            <a:pPr algn="ctr">
+              <a:defRPr sz="1050" b="0">
+                <a:solidFill>
+                  <a:srgbClr val="1F2937"/>
+                </a:solidFill>
+              </a:defRPr>
+            </a:pPr>
+            <a:r>
+              <a:rPr lang="es-MX" sz="1600" b="0" dirty="0">
+                <a:solidFill>
+                  <a:srgbClr val="1F2937"/>
+                </a:solidFill>
+              </a:rPr>
+              <a:t>tarjeta</a:t>
+            </a:r>
+            <a:endParaRPr sz="1600" b="0" dirty="0">
+              <a:solidFill>
+                <a:srgbClr val="1F2937"/>
+              </a:solidFill>
+            </a:endParaRPr>
+          </a:p>
+        </p:txBody>
+      </p:sp>
+      <p:sp>
+        <p:nvSpPr>
+          <p:cNvPr id="74" name="cls-table-cell-1-6">
+            <a:extLst>
+              <a:ext uri="{FF2B5EF4-FFF2-40B4-BE49-F238E27FC236}">
+                <a16:creationId xmlns:a16="http://schemas.microsoft.com/office/drawing/2014/main" id="{3F5060D4-FDFA-4DA4-BCFF-0771C144A0B0}"/>
+              </a:ext>
+            </a:extLst>
+          </p:cNvPr>
+          <p:cNvSpPr>
+            <a:spLocks noGrp="1"/>
+          </p:cNvSpPr>
+          <p:nvPr/>
+        </p:nvSpPr>
+        <p:spPr>
+          <a:xfrm>
+            <a:off x="10696575" y="2766060"/>
+            <a:ext cx="819150" cy="361950"/>
+          </a:xfrm>
+          <a:prstGeom prst="rect">
+            <a:avLst/>
+          </a:prstGeom>
+          <a:solidFill>
+            <a:srgbClr val="FBF7FD"/>
+          </a:solidFill>
+          <a:ln w="9525">
+            <a:solidFill>
+              <a:srgbClr val="AEB8C7"/>
+            </a:solidFill>
+            <a:prstDash val="solid"/>
+          </a:ln>
+        </p:spPr>
+      </p:sp>
+      <p:sp>
+        <p:nvSpPr>
+          <p:cNvPr id="75" name="cls-table-cell-text-1-6">
+            <a:extLst>
+              <a:ext uri="{FF2B5EF4-FFF2-40B4-BE49-F238E27FC236}">
+                <a16:creationId xmlns:a16="http://schemas.microsoft.com/office/drawing/2014/main" id="{9AFB746A-2F9D-48DD-8BBB-776475DFB652}"/>
+              </a:ext>
+            </a:extLst>
+          </p:cNvPr>
+          <p:cNvSpPr>
+            <a:spLocks noGrp="1"/>
+          </p:cNvSpPr>
+          <p:nvPr/>
+        </p:nvSpPr>
+        <p:spPr>
+          <a:xfrm>
+            <a:off x="10725150" y="2832735"/>
+            <a:ext cx="762000" cy="257175"/>
+          </a:xfrm>
+          <a:prstGeom prst="rect">
+            <a:avLst/>
+          </a:prstGeom>
+          <a:noFill/>
+          <a:ln w="0">
+            <a:noFill/>
+            <a:prstDash val="solid"/>
+          </a:ln>
+        </p:spPr>
+        <p:txBody>
+          <a:bodyPr/>
+          <a:lstStyle/>
+          <a:p>
+            <a:pPr algn="ctr">
+              <a:defRPr sz="1050" b="0">
+                <a:solidFill>
+                  <a:srgbClr val="1F2937"/>
+                </a:solidFill>
+              </a:defRPr>
+            </a:pPr>
+            <a:r>
+              <a:rPr sz="1600" b="0">
+                <a:solidFill>
+                  <a:srgbClr val="1F2937"/>
+                </a:solidFill>
+              </a:rPr>
+              <a:t>0</a:t>
+            </a:r>
+          </a:p>
+        </p:txBody>
+      </p:sp>
+      <p:sp>
+        <p:nvSpPr>
+          <p:cNvPr id="76" name="cls-table-cell-2-0">
+            <a:extLst>
+              <a:ext uri="{FF2B5EF4-FFF2-40B4-BE49-F238E27FC236}">
+                <a16:creationId xmlns:a16="http://schemas.microsoft.com/office/drawing/2014/main" id="{6D38797D-DA8A-4CA6-AF8B-EAA8817712CE}"/>
+              </a:ext>
+            </a:extLst>
+          </p:cNvPr>
+          <p:cNvSpPr>
+            <a:spLocks noGrp="1"/>
+          </p:cNvSpPr>
+          <p:nvPr/>
+        </p:nvSpPr>
+        <p:spPr>
+          <a:xfrm>
+            <a:off x="7315200" y="3128010"/>
+            <a:ext cx="704850" cy="361950"/>
           </a:xfrm>
           <a:prstGeom prst="rect">
             <a:avLst/>
@@ -4449,22 +5159,22 @@
       </p:sp>
       <p:sp>
         <p:nvSpPr>
-          <p:cNvPr id="59" name="cls-table-cell-text-0-5">
-            <a:extLst>
-              <a:ext uri="{FF2B5EF4-FFF2-40B4-BE49-F238E27FC236}">
-                <a16:creationId xmlns:a16="http://schemas.microsoft.com/office/drawing/2014/main" id="{20915C1B-7B0B-490C-BAD9-EAFC6FB85A41}"/>
-              </a:ext>
-            </a:extLst>
-          </p:cNvPr>
-          <p:cNvSpPr>
-            <a:spLocks noGrp="1"/>
-          </p:cNvSpPr>
-          <p:nvPr/>
-        </p:nvSpPr>
-        <p:spPr>
-          <a:xfrm>
-            <a:off x="9667875" y="2466975"/>
-            <a:ext cx="742950" cy="257175"/>
+          <p:cNvPr id="77" name="cls-table-cell-text-2-0">
+            <a:extLst>
+              <a:ext uri="{FF2B5EF4-FFF2-40B4-BE49-F238E27FC236}">
+                <a16:creationId xmlns:a16="http://schemas.microsoft.com/office/drawing/2014/main" id="{976C1EA8-7678-4B4C-A0AF-EBBCF0432980}"/>
+              </a:ext>
+            </a:extLst>
+          </p:cNvPr>
+          <p:cNvSpPr>
+            <a:spLocks noGrp="1"/>
+          </p:cNvSpPr>
+          <p:nvPr/>
+        </p:nvSpPr>
+        <p:spPr>
+          <a:xfrm>
+            <a:off x="7343775" y="3194685"/>
+            <a:ext cx="647700" cy="257175"/>
           </a:xfrm>
           <a:prstGeom prst="rect">
             <a:avLst/>
@@ -4487,33 +5197,365 @@
               </a:defRPr>
             </a:pPr>
             <a:r>
-              <a:rPr sz="1050" b="0">
-                <a:solidFill>
-                  <a:srgbClr val="1F2937"/>
-                </a:solidFill>
-              </a:rPr>
-              <a:t>Efectivo</a:t>
-            </a:r>
-          </a:p>
-        </p:txBody>
-      </p:sp>
-      <p:sp>
-        <p:nvSpPr>
-          <p:cNvPr id="60" name="cls-table-cell-0-6">
-            <a:extLst>
-              <a:ext uri="{FF2B5EF4-FFF2-40B4-BE49-F238E27FC236}">
-                <a16:creationId xmlns:a16="http://schemas.microsoft.com/office/drawing/2014/main" id="{F6E013BF-E418-4307-9AB6-9A46959EE478}"/>
-              </a:ext>
-            </a:extLst>
-          </p:cNvPr>
-          <p:cNvSpPr>
-            <a:spLocks noGrp="1"/>
-          </p:cNvSpPr>
-          <p:nvPr/>
-        </p:nvSpPr>
-        <p:spPr>
-          <a:xfrm>
-            <a:off x="10439400" y="2400300"/>
+              <a:rPr sz="1600" b="0">
+                <a:solidFill>
+                  <a:srgbClr val="1F2937"/>
+                </a:solidFill>
+              </a:rPr>
+              <a:t>U002</a:t>
+            </a:r>
+          </a:p>
+        </p:txBody>
+      </p:sp>
+      <p:sp>
+        <p:nvSpPr>
+          <p:cNvPr id="78" name="cls-table-cell-2-1">
+            <a:extLst>
+              <a:ext uri="{FF2B5EF4-FFF2-40B4-BE49-F238E27FC236}">
+                <a16:creationId xmlns:a16="http://schemas.microsoft.com/office/drawing/2014/main" id="{17C43C37-7C94-47CB-80DB-C775285237DE}"/>
+              </a:ext>
+            </a:extLst>
+          </p:cNvPr>
+          <p:cNvSpPr>
+            <a:spLocks noGrp="1"/>
+          </p:cNvSpPr>
+          <p:nvPr/>
+        </p:nvSpPr>
+        <p:spPr>
+          <a:xfrm>
+            <a:off x="8020050" y="3128010"/>
+            <a:ext cx="723900" cy="361950"/>
+          </a:xfrm>
+          <a:prstGeom prst="rect">
+            <a:avLst/>
+          </a:prstGeom>
+          <a:solidFill>
+            <a:srgbClr val="FFFFFF"/>
+          </a:solidFill>
+          <a:ln w="9525">
+            <a:solidFill>
+              <a:srgbClr val="AEB8C7"/>
+            </a:solidFill>
+            <a:prstDash val="solid"/>
+          </a:ln>
+        </p:spPr>
+      </p:sp>
+      <p:sp>
+        <p:nvSpPr>
+          <p:cNvPr id="79" name="cls-table-cell-text-2-1">
+            <a:extLst>
+              <a:ext uri="{FF2B5EF4-FFF2-40B4-BE49-F238E27FC236}">
+                <a16:creationId xmlns:a16="http://schemas.microsoft.com/office/drawing/2014/main" id="{7C0F89E4-94A5-48E5-AE6F-1083895FB398}"/>
+              </a:ext>
+            </a:extLst>
+          </p:cNvPr>
+          <p:cNvSpPr>
+            <a:spLocks noGrp="1"/>
+          </p:cNvSpPr>
+          <p:nvPr/>
+        </p:nvSpPr>
+        <p:spPr>
+          <a:xfrm>
+            <a:off x="8048625" y="3194685"/>
+            <a:ext cx="666750" cy="257175"/>
+          </a:xfrm>
+          <a:prstGeom prst="rect">
+            <a:avLst/>
+          </a:prstGeom>
+          <a:noFill/>
+          <a:ln w="0">
+            <a:noFill/>
+            <a:prstDash val="solid"/>
+          </a:ln>
+        </p:spPr>
+        <p:txBody>
+          <a:bodyPr/>
+          <a:lstStyle/>
+          <a:p>
+            <a:pPr algn="ctr">
+              <a:defRPr sz="1050" b="0">
+                <a:solidFill>
+                  <a:srgbClr val="1F2937"/>
+                </a:solidFill>
+              </a:defRPr>
+            </a:pPr>
+            <a:r>
+              <a:rPr sz="1600" b="0">
+                <a:solidFill>
+                  <a:srgbClr val="1F2937"/>
+                </a:solidFill>
+              </a:rPr>
+              <a:t>P002</a:t>
+            </a:r>
+          </a:p>
+        </p:txBody>
+      </p:sp>
+      <p:sp>
+        <p:nvSpPr>
+          <p:cNvPr id="80" name="cls-table-cell-2-2">
+            <a:extLst>
+              <a:ext uri="{FF2B5EF4-FFF2-40B4-BE49-F238E27FC236}">
+                <a16:creationId xmlns:a16="http://schemas.microsoft.com/office/drawing/2014/main" id="{C7EF6252-CFDC-4054-BD43-C84F242843A2}"/>
+              </a:ext>
+            </a:extLst>
+          </p:cNvPr>
+          <p:cNvSpPr>
+            <a:spLocks noGrp="1"/>
+          </p:cNvSpPr>
+          <p:nvPr/>
+        </p:nvSpPr>
+        <p:spPr>
+          <a:xfrm>
+            <a:off x="8743950" y="3128010"/>
+            <a:ext cx="552450" cy="361950"/>
+          </a:xfrm>
+          <a:prstGeom prst="rect">
+            <a:avLst/>
+          </a:prstGeom>
+          <a:solidFill>
+            <a:srgbClr val="FFFFFF"/>
+          </a:solidFill>
+          <a:ln w="9525">
+            <a:solidFill>
+              <a:srgbClr val="AEB8C7"/>
+            </a:solidFill>
+            <a:prstDash val="solid"/>
+          </a:ln>
+        </p:spPr>
+      </p:sp>
+      <p:sp>
+        <p:nvSpPr>
+          <p:cNvPr id="81" name="cls-table-cell-text-2-2">
+            <a:extLst>
+              <a:ext uri="{FF2B5EF4-FFF2-40B4-BE49-F238E27FC236}">
+                <a16:creationId xmlns:a16="http://schemas.microsoft.com/office/drawing/2014/main" id="{FF88FCA7-1EB9-41BA-9C56-B715F72E06FB}"/>
+              </a:ext>
+            </a:extLst>
+          </p:cNvPr>
+          <p:cNvSpPr>
+            <a:spLocks noGrp="1"/>
+          </p:cNvSpPr>
+          <p:nvPr/>
+        </p:nvSpPr>
+        <p:spPr>
+          <a:xfrm>
+            <a:off x="8772525" y="3194685"/>
+            <a:ext cx="495300" cy="257175"/>
+          </a:xfrm>
+          <a:prstGeom prst="rect">
+            <a:avLst/>
+          </a:prstGeom>
+          <a:noFill/>
+          <a:ln w="0">
+            <a:noFill/>
+            <a:prstDash val="solid"/>
+          </a:ln>
+        </p:spPr>
+        <p:txBody>
+          <a:bodyPr/>
+          <a:lstStyle/>
+          <a:p>
+            <a:pPr algn="ctr">
+              <a:defRPr sz="1050" b="0">
+                <a:solidFill>
+                  <a:srgbClr val="1F2937"/>
+                </a:solidFill>
+              </a:defRPr>
+            </a:pPr>
+            <a:r>
+              <a:rPr sz="1600" b="0">
+                <a:solidFill>
+                  <a:srgbClr val="1F2937"/>
+                </a:solidFill>
+              </a:rPr>
+              <a:t>2</a:t>
+            </a:r>
+          </a:p>
+        </p:txBody>
+      </p:sp>
+      <p:sp>
+        <p:nvSpPr>
+          <p:cNvPr id="84" name="cls-table-cell-2-4">
+            <a:extLst>
+              <a:ext uri="{FF2B5EF4-FFF2-40B4-BE49-F238E27FC236}">
+                <a16:creationId xmlns:a16="http://schemas.microsoft.com/office/drawing/2014/main" id="{14B23AE5-D075-4202-8585-EFEFE9C40CAC}"/>
+              </a:ext>
+            </a:extLst>
+          </p:cNvPr>
+          <p:cNvSpPr>
+            <a:spLocks noGrp="1"/>
+          </p:cNvSpPr>
+          <p:nvPr/>
+        </p:nvSpPr>
+        <p:spPr>
+          <a:xfrm>
+            <a:off x="9286875" y="3128010"/>
+            <a:ext cx="609600" cy="361950"/>
+          </a:xfrm>
+          <a:prstGeom prst="rect">
+            <a:avLst/>
+          </a:prstGeom>
+          <a:solidFill>
+            <a:srgbClr val="FFFFFF"/>
+          </a:solidFill>
+          <a:ln w="9525">
+            <a:solidFill>
+              <a:srgbClr val="AEB8C7"/>
+            </a:solidFill>
+            <a:prstDash val="solid"/>
+          </a:ln>
+        </p:spPr>
+      </p:sp>
+      <p:sp>
+        <p:nvSpPr>
+          <p:cNvPr id="85" name="cls-table-cell-text-2-4">
+            <a:extLst>
+              <a:ext uri="{FF2B5EF4-FFF2-40B4-BE49-F238E27FC236}">
+                <a16:creationId xmlns:a16="http://schemas.microsoft.com/office/drawing/2014/main" id="{DB3B8A8F-98FD-4D15-852D-E3C28F33027D}"/>
+              </a:ext>
+            </a:extLst>
+          </p:cNvPr>
+          <p:cNvSpPr>
+            <a:spLocks noGrp="1"/>
+          </p:cNvSpPr>
+          <p:nvPr/>
+        </p:nvSpPr>
+        <p:spPr>
+          <a:xfrm>
+            <a:off x="9315450" y="3194685"/>
+            <a:ext cx="552450" cy="257175"/>
+          </a:xfrm>
+          <a:prstGeom prst="rect">
+            <a:avLst/>
+          </a:prstGeom>
+          <a:noFill/>
+          <a:ln w="0">
+            <a:noFill/>
+            <a:prstDash val="solid"/>
+          </a:ln>
+        </p:spPr>
+        <p:txBody>
+          <a:bodyPr/>
+          <a:lstStyle/>
+          <a:p>
+            <a:pPr algn="ctr">
+              <a:defRPr sz="1050" b="0">
+                <a:solidFill>
+                  <a:srgbClr val="1F2937"/>
+                </a:solidFill>
+              </a:defRPr>
+            </a:pPr>
+            <a:r>
+              <a:rPr sz="1600" b="0">
+                <a:solidFill>
+                  <a:srgbClr val="1F2937"/>
+                </a:solidFill>
+              </a:rPr>
+              <a:t>480</a:t>
+            </a:r>
+          </a:p>
+        </p:txBody>
+      </p:sp>
+      <p:sp>
+        <p:nvSpPr>
+          <p:cNvPr id="86" name="cls-table-cell-2-5">
+            <a:extLst>
+              <a:ext uri="{FF2B5EF4-FFF2-40B4-BE49-F238E27FC236}">
+                <a16:creationId xmlns:a16="http://schemas.microsoft.com/office/drawing/2014/main" id="{9E1A4F5A-383E-4E41-836E-E56FED71AB61}"/>
+              </a:ext>
+            </a:extLst>
+          </p:cNvPr>
+          <p:cNvSpPr>
+            <a:spLocks noGrp="1"/>
+          </p:cNvSpPr>
+          <p:nvPr/>
+        </p:nvSpPr>
+        <p:spPr>
+          <a:xfrm>
+            <a:off x="9896475" y="3128010"/>
+            <a:ext cx="800100" cy="361950"/>
+          </a:xfrm>
+          <a:prstGeom prst="rect">
+            <a:avLst/>
+          </a:prstGeom>
+          <a:solidFill>
+            <a:srgbClr val="FFFFFF"/>
+          </a:solidFill>
+          <a:ln w="9525">
+            <a:solidFill>
+              <a:srgbClr val="AEB8C7"/>
+            </a:solidFill>
+            <a:prstDash val="solid"/>
+          </a:ln>
+        </p:spPr>
+      </p:sp>
+      <p:sp>
+        <p:nvSpPr>
+          <p:cNvPr id="87" name="cls-table-cell-text-2-5">
+            <a:extLst>
+              <a:ext uri="{FF2B5EF4-FFF2-40B4-BE49-F238E27FC236}">
+                <a16:creationId xmlns:a16="http://schemas.microsoft.com/office/drawing/2014/main" id="{61AB29C4-8F61-4D61-A593-6000757EB560}"/>
+              </a:ext>
+            </a:extLst>
+          </p:cNvPr>
+          <p:cNvSpPr>
+            <a:spLocks noGrp="1"/>
+          </p:cNvSpPr>
+          <p:nvPr/>
+        </p:nvSpPr>
+        <p:spPr>
+          <a:xfrm>
+            <a:off x="9925050" y="3194685"/>
+            <a:ext cx="742950" cy="257175"/>
+          </a:xfrm>
+          <a:prstGeom prst="rect">
+            <a:avLst/>
+          </a:prstGeom>
+          <a:noFill/>
+          <a:ln w="0">
+            <a:noFill/>
+            <a:prstDash val="solid"/>
+          </a:ln>
+        </p:spPr>
+        <p:txBody>
+          <a:bodyPr/>
+          <a:lstStyle/>
+          <a:p>
+            <a:pPr algn="ctr">
+              <a:defRPr sz="1050" b="0">
+                <a:solidFill>
+                  <a:srgbClr val="1F2937"/>
+                </a:solidFill>
+              </a:defRPr>
+            </a:pPr>
+            <a:r>
+              <a:rPr sz="1600" b="0">
+                <a:solidFill>
+                  <a:srgbClr val="1F2937"/>
+                </a:solidFill>
+              </a:rPr>
+              <a:t>PayPal</a:t>
+            </a:r>
+          </a:p>
+        </p:txBody>
+      </p:sp>
+      <p:sp>
+        <p:nvSpPr>
+          <p:cNvPr id="88" name="cls-table-cell-2-6">
+            <a:extLst>
+              <a:ext uri="{FF2B5EF4-FFF2-40B4-BE49-F238E27FC236}">
+                <a16:creationId xmlns:a16="http://schemas.microsoft.com/office/drawing/2014/main" id="{E5B4C0DE-24D1-473E-98F9-1AB05A45F898}"/>
+              </a:ext>
+            </a:extLst>
+          </p:cNvPr>
+          <p:cNvSpPr>
+            <a:spLocks noGrp="1"/>
+          </p:cNvSpPr>
+          <p:nvPr/>
+        </p:nvSpPr>
+        <p:spPr>
+          <a:xfrm>
+            <a:off x="10696575" y="3128010"/>
             <a:ext cx="819150" cy="361950"/>
           </a:xfrm>
           <a:prstGeom prst="rect">
@@ -4532,21 +5574,21 @@
       </p:sp>
       <p:sp>
         <p:nvSpPr>
-          <p:cNvPr id="61" name="cls-table-cell-text-0-6">
-            <a:extLst>
-              <a:ext uri="{FF2B5EF4-FFF2-40B4-BE49-F238E27FC236}">
-                <a16:creationId xmlns:a16="http://schemas.microsoft.com/office/drawing/2014/main" id="{2DFE4335-944B-4DD8-A015-B4F6C066108E}"/>
-              </a:ext>
-            </a:extLst>
-          </p:cNvPr>
-          <p:cNvSpPr>
-            <a:spLocks noGrp="1"/>
-          </p:cNvSpPr>
-          <p:nvPr/>
-        </p:nvSpPr>
-        <p:spPr>
-          <a:xfrm>
-            <a:off x="10467975" y="2466975"/>
+          <p:cNvPr id="89" name="cls-table-cell-text-2-6">
+            <a:extLst>
+              <a:ext uri="{FF2B5EF4-FFF2-40B4-BE49-F238E27FC236}">
+                <a16:creationId xmlns:a16="http://schemas.microsoft.com/office/drawing/2014/main" id="{B4E8D68B-319D-4420-9B58-B9209FDB108B}"/>
+              </a:ext>
+            </a:extLst>
+          </p:cNvPr>
+          <p:cNvSpPr>
+            <a:spLocks noGrp="1"/>
+          </p:cNvSpPr>
+          <p:nvPr/>
+        </p:nvSpPr>
+        <p:spPr>
+          <a:xfrm>
+            <a:off x="10725150" y="3194685"/>
             <a:ext cx="762000" cy="257175"/>
           </a:xfrm>
           <a:prstGeom prst="rect">
@@ -4570,1169 +5612,7 @@
               </a:defRPr>
             </a:pPr>
             <a:r>
-              <a:rPr sz="1050" b="0">
-                <a:solidFill>
-                  <a:srgbClr val="1F2937"/>
-                </a:solidFill>
-              </a:rPr>
-              <a:t>0</a:t>
-            </a:r>
-          </a:p>
-        </p:txBody>
-      </p:sp>
-      <p:sp>
-        <p:nvSpPr>
-          <p:cNvPr id="62" name="cls-table-cell-1-0">
-            <a:extLst>
-              <a:ext uri="{FF2B5EF4-FFF2-40B4-BE49-F238E27FC236}">
-                <a16:creationId xmlns:a16="http://schemas.microsoft.com/office/drawing/2014/main" id="{56C0B7C2-6797-45CB-9E81-D5CF57918F44}"/>
-              </a:ext>
-            </a:extLst>
-          </p:cNvPr>
-          <p:cNvSpPr>
-            <a:spLocks noGrp="1"/>
-          </p:cNvSpPr>
-          <p:nvPr/>
-        </p:nvSpPr>
-        <p:spPr>
-          <a:xfrm>
-            <a:off x="6477000" y="2762250"/>
-            <a:ext cx="704850" cy="361950"/>
-          </a:xfrm>
-          <a:prstGeom prst="rect">
-            <a:avLst/>
-          </a:prstGeom>
-          <a:solidFill>
-            <a:srgbClr val="F7FAF7"/>
-          </a:solidFill>
-          <a:ln w="9525">
-            <a:solidFill>
-              <a:srgbClr val="AEB8C7"/>
-            </a:solidFill>
-            <a:prstDash val="solid"/>
-          </a:ln>
-        </p:spPr>
-      </p:sp>
-      <p:sp>
-        <p:nvSpPr>
-          <p:cNvPr id="63" name="cls-table-cell-text-1-0">
-            <a:extLst>
-              <a:ext uri="{FF2B5EF4-FFF2-40B4-BE49-F238E27FC236}">
-                <a16:creationId xmlns:a16="http://schemas.microsoft.com/office/drawing/2014/main" id="{132A26B1-3A84-461F-A452-1796A1ADD7E6}"/>
-              </a:ext>
-            </a:extLst>
-          </p:cNvPr>
-          <p:cNvSpPr>
-            <a:spLocks noGrp="1"/>
-          </p:cNvSpPr>
-          <p:nvPr/>
-        </p:nvSpPr>
-        <p:spPr>
-          <a:xfrm>
-            <a:off x="6505575" y="2828925"/>
-            <a:ext cx="647700" cy="257175"/>
-          </a:xfrm>
-          <a:prstGeom prst="rect">
-            <a:avLst/>
-          </a:prstGeom>
-          <a:noFill/>
-          <a:ln w="0">
-            <a:noFill/>
-            <a:prstDash val="solid"/>
-          </a:ln>
-        </p:spPr>
-        <p:txBody>
-          <a:bodyPr/>
-          <a:lstStyle/>
-          <a:p>
-            <a:pPr algn="ctr">
-              <a:defRPr sz="1050" b="0">
-                <a:solidFill>
-                  <a:srgbClr val="1F2937"/>
-                </a:solidFill>
-              </a:defRPr>
-            </a:pPr>
-            <a:r>
-              <a:rPr sz="1050" b="0">
-                <a:solidFill>
-                  <a:srgbClr val="1F2937"/>
-                </a:solidFill>
-              </a:rPr>
-              <a:t>U001</a:t>
-            </a:r>
-          </a:p>
-        </p:txBody>
-      </p:sp>
-      <p:sp>
-        <p:nvSpPr>
-          <p:cNvPr id="64" name="cls-table-cell-1-1">
-            <a:extLst>
-              <a:ext uri="{FF2B5EF4-FFF2-40B4-BE49-F238E27FC236}">
-                <a16:creationId xmlns:a16="http://schemas.microsoft.com/office/drawing/2014/main" id="{8B0380C8-6D7A-4067-8432-0E7C4FB528DE}"/>
-              </a:ext>
-            </a:extLst>
-          </p:cNvPr>
-          <p:cNvSpPr>
-            <a:spLocks noGrp="1"/>
-          </p:cNvSpPr>
-          <p:nvPr/>
-        </p:nvSpPr>
-        <p:spPr>
-          <a:xfrm>
-            <a:off x="7181850" y="2762250"/>
-            <a:ext cx="723900" cy="361950"/>
-          </a:xfrm>
-          <a:prstGeom prst="rect">
-            <a:avLst/>
-          </a:prstGeom>
-          <a:solidFill>
-            <a:srgbClr val="F7FAF7"/>
-          </a:solidFill>
-          <a:ln w="9525">
-            <a:solidFill>
-              <a:srgbClr val="AEB8C7"/>
-            </a:solidFill>
-            <a:prstDash val="solid"/>
-          </a:ln>
-        </p:spPr>
-      </p:sp>
-      <p:sp>
-        <p:nvSpPr>
-          <p:cNvPr id="65" name="cls-table-cell-text-1-1">
-            <a:extLst>
-              <a:ext uri="{FF2B5EF4-FFF2-40B4-BE49-F238E27FC236}">
-                <a16:creationId xmlns:a16="http://schemas.microsoft.com/office/drawing/2014/main" id="{7935CD24-6403-4F55-B225-642D3889A5F9}"/>
-              </a:ext>
-            </a:extLst>
-          </p:cNvPr>
-          <p:cNvSpPr>
-            <a:spLocks noGrp="1"/>
-          </p:cNvSpPr>
-          <p:nvPr/>
-        </p:nvSpPr>
-        <p:spPr>
-          <a:xfrm>
-            <a:off x="7210425" y="2828925"/>
-            <a:ext cx="666750" cy="257175"/>
-          </a:xfrm>
-          <a:prstGeom prst="rect">
-            <a:avLst/>
-          </a:prstGeom>
-          <a:noFill/>
-          <a:ln w="0">
-            <a:noFill/>
-            <a:prstDash val="solid"/>
-          </a:ln>
-        </p:spPr>
-        <p:txBody>
-          <a:bodyPr/>
-          <a:lstStyle/>
-          <a:p>
-            <a:pPr algn="ctr">
-              <a:defRPr sz="1050" b="0">
-                <a:solidFill>
-                  <a:srgbClr val="1F2937"/>
-                </a:solidFill>
-              </a:defRPr>
-            </a:pPr>
-            <a:r>
-              <a:rPr sz="1050" b="0">
-                <a:solidFill>
-                  <a:srgbClr val="1F2937"/>
-                </a:solidFill>
-              </a:rPr>
-              <a:t>P004</a:t>
-            </a:r>
-          </a:p>
-        </p:txBody>
-      </p:sp>
-      <p:sp>
-        <p:nvSpPr>
-          <p:cNvPr id="66" name="cls-table-cell-1-2">
-            <a:extLst>
-              <a:ext uri="{FF2B5EF4-FFF2-40B4-BE49-F238E27FC236}">
-                <a16:creationId xmlns:a16="http://schemas.microsoft.com/office/drawing/2014/main" id="{3E688AE0-6911-46B6-BF33-5B630C02644A}"/>
-              </a:ext>
-            </a:extLst>
-          </p:cNvPr>
-          <p:cNvSpPr>
-            <a:spLocks noGrp="1"/>
-          </p:cNvSpPr>
-          <p:nvPr/>
-        </p:nvSpPr>
-        <p:spPr>
-          <a:xfrm>
-            <a:off x="7905750" y="2762250"/>
-            <a:ext cx="552450" cy="361950"/>
-          </a:xfrm>
-          <a:prstGeom prst="rect">
-            <a:avLst/>
-          </a:prstGeom>
-          <a:solidFill>
-            <a:srgbClr val="F7FAF7"/>
-          </a:solidFill>
-          <a:ln w="9525">
-            <a:solidFill>
-              <a:srgbClr val="AEB8C7"/>
-            </a:solidFill>
-            <a:prstDash val="solid"/>
-          </a:ln>
-        </p:spPr>
-      </p:sp>
-      <p:sp>
-        <p:nvSpPr>
-          <p:cNvPr id="67" name="cls-table-cell-text-1-2">
-            <a:extLst>
-              <a:ext uri="{FF2B5EF4-FFF2-40B4-BE49-F238E27FC236}">
-                <a16:creationId xmlns:a16="http://schemas.microsoft.com/office/drawing/2014/main" id="{255E8F59-C665-4579-966A-5D9CEF316BEA}"/>
-              </a:ext>
-            </a:extLst>
-          </p:cNvPr>
-          <p:cNvSpPr>
-            <a:spLocks noGrp="1"/>
-          </p:cNvSpPr>
-          <p:nvPr/>
-        </p:nvSpPr>
-        <p:spPr>
-          <a:xfrm>
-            <a:off x="7934325" y="2828925"/>
-            <a:ext cx="495300" cy="257175"/>
-          </a:xfrm>
-          <a:prstGeom prst="rect">
-            <a:avLst/>
-          </a:prstGeom>
-          <a:noFill/>
-          <a:ln w="0">
-            <a:noFill/>
-            <a:prstDash val="solid"/>
-          </a:ln>
-        </p:spPr>
-        <p:txBody>
-          <a:bodyPr/>
-          <a:lstStyle/>
-          <a:p>
-            <a:pPr algn="ctr">
-              <a:defRPr sz="1050" b="0">
-                <a:solidFill>
-                  <a:srgbClr val="1F2937"/>
-                </a:solidFill>
-              </a:defRPr>
-            </a:pPr>
-            <a:r>
-              <a:rPr sz="1050" b="0">
-                <a:solidFill>
-                  <a:srgbClr val="1F2937"/>
-                </a:solidFill>
-              </a:rPr>
-              <a:t>7</a:t>
-            </a:r>
-          </a:p>
-        </p:txBody>
-      </p:sp>
-      <p:sp>
-        <p:nvSpPr>
-          <p:cNvPr id="68" name="cls-table-cell-1-3">
-            <a:extLst>
-              <a:ext uri="{FF2B5EF4-FFF2-40B4-BE49-F238E27FC236}">
-                <a16:creationId xmlns:a16="http://schemas.microsoft.com/office/drawing/2014/main" id="{9968BE30-3AB0-4AFB-B456-67F65A50FCC9}"/>
-              </a:ext>
-            </a:extLst>
-          </p:cNvPr>
-          <p:cNvSpPr>
-            <a:spLocks noGrp="1"/>
-          </p:cNvSpPr>
-          <p:nvPr/>
-        </p:nvSpPr>
-        <p:spPr>
-          <a:xfrm>
-            <a:off x="8458200" y="2762250"/>
-            <a:ext cx="571500" cy="361950"/>
-          </a:xfrm>
-          <a:prstGeom prst="rect">
-            <a:avLst/>
-          </a:prstGeom>
-          <a:solidFill>
-            <a:srgbClr val="F7FAF7"/>
-          </a:solidFill>
-          <a:ln w="9525">
-            <a:solidFill>
-              <a:srgbClr val="AEB8C7"/>
-            </a:solidFill>
-            <a:prstDash val="solid"/>
-          </a:ln>
-        </p:spPr>
-      </p:sp>
-      <p:sp>
-        <p:nvSpPr>
-          <p:cNvPr id="69" name="cls-table-cell-text-1-3">
-            <a:extLst>
-              <a:ext uri="{FF2B5EF4-FFF2-40B4-BE49-F238E27FC236}">
-                <a16:creationId xmlns:a16="http://schemas.microsoft.com/office/drawing/2014/main" id="{C5CA6B0D-C82C-4C32-BF14-40861C9EADAA}"/>
-              </a:ext>
-            </a:extLst>
-          </p:cNvPr>
-          <p:cNvSpPr>
-            <a:spLocks noGrp="1"/>
-          </p:cNvSpPr>
-          <p:nvPr/>
-        </p:nvSpPr>
-        <p:spPr>
-          <a:xfrm>
-            <a:off x="8486775" y="2828925"/>
-            <a:ext cx="514350" cy="257175"/>
-          </a:xfrm>
-          <a:prstGeom prst="rect">
-            <a:avLst/>
-          </a:prstGeom>
-          <a:noFill/>
-          <a:ln w="0">
-            <a:noFill/>
-            <a:prstDash val="solid"/>
-          </a:ln>
-        </p:spPr>
-        <p:txBody>
-          <a:bodyPr/>
-          <a:lstStyle/>
-          <a:p>
-            <a:pPr algn="ctr">
-              <a:defRPr sz="1050" b="0">
-                <a:solidFill>
-                  <a:srgbClr val="1F2937"/>
-                </a:solidFill>
-              </a:defRPr>
-            </a:pPr>
-            <a:r>
-              <a:rPr sz="1050" b="0">
-                <a:solidFill>
-                  <a:srgbClr val="1F2937"/>
-                </a:solidFill>
-              </a:rPr>
-              <a:t>150</a:t>
-            </a:r>
-          </a:p>
-        </p:txBody>
-      </p:sp>
-      <p:sp>
-        <p:nvSpPr>
-          <p:cNvPr id="70" name="cls-table-cell-1-4">
-            <a:extLst>
-              <a:ext uri="{FF2B5EF4-FFF2-40B4-BE49-F238E27FC236}">
-                <a16:creationId xmlns:a16="http://schemas.microsoft.com/office/drawing/2014/main" id="{8A350935-6AF3-4E0B-994B-3182F278C3BE}"/>
-              </a:ext>
-            </a:extLst>
-          </p:cNvPr>
-          <p:cNvSpPr>
-            <a:spLocks noGrp="1"/>
-          </p:cNvSpPr>
-          <p:nvPr/>
-        </p:nvSpPr>
-        <p:spPr>
-          <a:xfrm>
-            <a:off x="9029700" y="2762250"/>
-            <a:ext cx="609600" cy="361950"/>
-          </a:xfrm>
-          <a:prstGeom prst="rect">
-            <a:avLst/>
-          </a:prstGeom>
-          <a:solidFill>
-            <a:srgbClr val="F7FAF7"/>
-          </a:solidFill>
-          <a:ln w="9525">
-            <a:solidFill>
-              <a:srgbClr val="AEB8C7"/>
-            </a:solidFill>
-            <a:prstDash val="solid"/>
-          </a:ln>
-        </p:spPr>
-      </p:sp>
-      <p:sp>
-        <p:nvSpPr>
-          <p:cNvPr id="71" name="cls-table-cell-text-1-4">
-            <a:extLst>
-              <a:ext uri="{FF2B5EF4-FFF2-40B4-BE49-F238E27FC236}">
-                <a16:creationId xmlns:a16="http://schemas.microsoft.com/office/drawing/2014/main" id="{6F0BF1AE-8863-47A8-8250-DE9193FDEEAC}"/>
-              </a:ext>
-            </a:extLst>
-          </p:cNvPr>
-          <p:cNvSpPr>
-            <a:spLocks noGrp="1"/>
-          </p:cNvSpPr>
-          <p:nvPr/>
-        </p:nvSpPr>
-        <p:spPr>
-          <a:xfrm>
-            <a:off x="9058275" y="2828925"/>
-            <a:ext cx="552450" cy="257175"/>
-          </a:xfrm>
-          <a:prstGeom prst="rect">
-            <a:avLst/>
-          </a:prstGeom>
-          <a:noFill/>
-          <a:ln w="0">
-            <a:noFill/>
-            <a:prstDash val="solid"/>
-          </a:ln>
-        </p:spPr>
-        <p:txBody>
-          <a:bodyPr/>
-          <a:lstStyle/>
-          <a:p>
-            <a:pPr algn="ctr">
-              <a:defRPr sz="1050" b="0">
-                <a:solidFill>
-                  <a:srgbClr val="1F2937"/>
-                </a:solidFill>
-              </a:defRPr>
-            </a:pPr>
-            <a:r>
-              <a:rPr sz="1050" b="0">
-                <a:solidFill>
-                  <a:srgbClr val="1F2937"/>
-                </a:solidFill>
-              </a:rPr>
-              <a:t>1305</a:t>
-            </a:r>
-          </a:p>
-        </p:txBody>
-      </p:sp>
-      <p:sp>
-        <p:nvSpPr>
-          <p:cNvPr id="72" name="cls-table-cell-1-5">
-            <a:extLst>
-              <a:ext uri="{FF2B5EF4-FFF2-40B4-BE49-F238E27FC236}">
-                <a16:creationId xmlns:a16="http://schemas.microsoft.com/office/drawing/2014/main" id="{DA34A230-E01E-4819-982B-635E1F8EA529}"/>
-              </a:ext>
-            </a:extLst>
-          </p:cNvPr>
-          <p:cNvSpPr>
-            <a:spLocks noGrp="1"/>
-          </p:cNvSpPr>
-          <p:nvPr/>
-        </p:nvSpPr>
-        <p:spPr>
-          <a:xfrm>
-            <a:off x="9639300" y="2762250"/>
-            <a:ext cx="800100" cy="361950"/>
-          </a:xfrm>
-          <a:prstGeom prst="rect">
-            <a:avLst/>
-          </a:prstGeom>
-          <a:solidFill>
-            <a:srgbClr val="F7FAF7"/>
-          </a:solidFill>
-          <a:ln w="9525">
-            <a:solidFill>
-              <a:srgbClr val="AEB8C7"/>
-            </a:solidFill>
-            <a:prstDash val="solid"/>
-          </a:ln>
-        </p:spPr>
-      </p:sp>
-      <p:sp>
-        <p:nvSpPr>
-          <p:cNvPr id="73" name="cls-table-cell-text-1-5">
-            <a:extLst>
-              <a:ext uri="{FF2B5EF4-FFF2-40B4-BE49-F238E27FC236}">
-                <a16:creationId xmlns:a16="http://schemas.microsoft.com/office/drawing/2014/main" id="{32E46FE5-C922-4FE3-AA7A-CA4F4F261BDF}"/>
-              </a:ext>
-            </a:extLst>
-          </p:cNvPr>
-          <p:cNvSpPr>
-            <a:spLocks noGrp="1"/>
-          </p:cNvSpPr>
-          <p:nvPr/>
-        </p:nvSpPr>
-        <p:spPr>
-          <a:xfrm>
-            <a:off x="9667875" y="2828925"/>
-            <a:ext cx="742950" cy="257175"/>
-          </a:xfrm>
-          <a:prstGeom prst="rect">
-            <a:avLst/>
-          </a:prstGeom>
-          <a:noFill/>
-          <a:ln w="0">
-            <a:noFill/>
-            <a:prstDash val="solid"/>
-          </a:ln>
-        </p:spPr>
-        <p:txBody>
-          <a:bodyPr/>
-          <a:lstStyle/>
-          <a:p>
-            <a:pPr algn="ctr">
-              <a:defRPr sz="1050" b="0">
-                <a:solidFill>
-                  <a:srgbClr val="1F2937"/>
-                </a:solidFill>
-              </a:defRPr>
-            </a:pPr>
-            <a:r>
-              <a:rPr sz="1050" b="0">
-                <a:solidFill>
-                  <a:srgbClr val="1F2937"/>
-                </a:solidFill>
-              </a:rPr>
-              <a:t>Efectivo</a:t>
-            </a:r>
-          </a:p>
-        </p:txBody>
-      </p:sp>
-      <p:sp>
-        <p:nvSpPr>
-          <p:cNvPr id="74" name="cls-table-cell-1-6">
-            <a:extLst>
-              <a:ext uri="{FF2B5EF4-FFF2-40B4-BE49-F238E27FC236}">
-                <a16:creationId xmlns:a16="http://schemas.microsoft.com/office/drawing/2014/main" id="{3F5060D4-FDFA-4DA4-BCFF-0771C144A0B0}"/>
-              </a:ext>
-            </a:extLst>
-          </p:cNvPr>
-          <p:cNvSpPr>
-            <a:spLocks noGrp="1"/>
-          </p:cNvSpPr>
-          <p:nvPr/>
-        </p:nvSpPr>
-        <p:spPr>
-          <a:xfrm>
-            <a:off x="10439400" y="2762250"/>
-            <a:ext cx="819150" cy="361950"/>
-          </a:xfrm>
-          <a:prstGeom prst="rect">
-            <a:avLst/>
-          </a:prstGeom>
-          <a:solidFill>
-            <a:srgbClr val="FBF7FD"/>
-          </a:solidFill>
-          <a:ln w="9525">
-            <a:solidFill>
-              <a:srgbClr val="AEB8C7"/>
-            </a:solidFill>
-            <a:prstDash val="solid"/>
-          </a:ln>
-        </p:spPr>
-      </p:sp>
-      <p:sp>
-        <p:nvSpPr>
-          <p:cNvPr id="75" name="cls-table-cell-text-1-6">
-            <a:extLst>
-              <a:ext uri="{FF2B5EF4-FFF2-40B4-BE49-F238E27FC236}">
-                <a16:creationId xmlns:a16="http://schemas.microsoft.com/office/drawing/2014/main" id="{9AFB746A-2F9D-48DD-8BBB-776475DFB652}"/>
-              </a:ext>
-            </a:extLst>
-          </p:cNvPr>
-          <p:cNvSpPr>
-            <a:spLocks noGrp="1"/>
-          </p:cNvSpPr>
-          <p:nvPr/>
-        </p:nvSpPr>
-        <p:spPr>
-          <a:xfrm>
-            <a:off x="10467975" y="2828925"/>
-            <a:ext cx="762000" cy="257175"/>
-          </a:xfrm>
-          <a:prstGeom prst="rect">
-            <a:avLst/>
-          </a:prstGeom>
-          <a:noFill/>
-          <a:ln w="0">
-            <a:noFill/>
-            <a:prstDash val="solid"/>
-          </a:ln>
-        </p:spPr>
-        <p:txBody>
-          <a:bodyPr/>
-          <a:lstStyle/>
-          <a:p>
-            <a:pPr algn="ctr">
-              <a:defRPr sz="1050" b="0">
-                <a:solidFill>
-                  <a:srgbClr val="1F2937"/>
-                </a:solidFill>
-              </a:defRPr>
-            </a:pPr>
-            <a:r>
-              <a:rPr sz="1050" b="0">
-                <a:solidFill>
-                  <a:srgbClr val="1F2937"/>
-                </a:solidFill>
-              </a:rPr>
-              <a:t>0</a:t>
-            </a:r>
-          </a:p>
-        </p:txBody>
-      </p:sp>
-      <p:sp>
-        <p:nvSpPr>
-          <p:cNvPr id="76" name="cls-table-cell-2-0">
-            <a:extLst>
-              <a:ext uri="{FF2B5EF4-FFF2-40B4-BE49-F238E27FC236}">
-                <a16:creationId xmlns:a16="http://schemas.microsoft.com/office/drawing/2014/main" id="{6D38797D-DA8A-4CA6-AF8B-EAA8817712CE}"/>
-              </a:ext>
-            </a:extLst>
-          </p:cNvPr>
-          <p:cNvSpPr>
-            <a:spLocks noGrp="1"/>
-          </p:cNvSpPr>
-          <p:nvPr/>
-        </p:nvSpPr>
-        <p:spPr>
-          <a:xfrm>
-            <a:off x="6477000" y="3124200"/>
-            <a:ext cx="704850" cy="361950"/>
-          </a:xfrm>
-          <a:prstGeom prst="rect">
-            <a:avLst/>
-          </a:prstGeom>
-          <a:solidFill>
-            <a:srgbClr val="FFFFFF"/>
-          </a:solidFill>
-          <a:ln w="9525">
-            <a:solidFill>
-              <a:srgbClr val="AEB8C7"/>
-            </a:solidFill>
-            <a:prstDash val="solid"/>
-          </a:ln>
-        </p:spPr>
-      </p:sp>
-      <p:sp>
-        <p:nvSpPr>
-          <p:cNvPr id="77" name="cls-table-cell-text-2-0">
-            <a:extLst>
-              <a:ext uri="{FF2B5EF4-FFF2-40B4-BE49-F238E27FC236}">
-                <a16:creationId xmlns:a16="http://schemas.microsoft.com/office/drawing/2014/main" id="{976C1EA8-7678-4B4C-A0AF-EBBCF0432980}"/>
-              </a:ext>
-            </a:extLst>
-          </p:cNvPr>
-          <p:cNvSpPr>
-            <a:spLocks noGrp="1"/>
-          </p:cNvSpPr>
-          <p:nvPr/>
-        </p:nvSpPr>
-        <p:spPr>
-          <a:xfrm>
-            <a:off x="6505575" y="3190875"/>
-            <a:ext cx="647700" cy="257175"/>
-          </a:xfrm>
-          <a:prstGeom prst="rect">
-            <a:avLst/>
-          </a:prstGeom>
-          <a:noFill/>
-          <a:ln w="0">
-            <a:noFill/>
-            <a:prstDash val="solid"/>
-          </a:ln>
-        </p:spPr>
-        <p:txBody>
-          <a:bodyPr/>
-          <a:lstStyle/>
-          <a:p>
-            <a:pPr algn="ctr">
-              <a:defRPr sz="1050" b="0">
-                <a:solidFill>
-                  <a:srgbClr val="1F2937"/>
-                </a:solidFill>
-              </a:defRPr>
-            </a:pPr>
-            <a:r>
-              <a:rPr sz="1050" b="0">
-                <a:solidFill>
-                  <a:srgbClr val="1F2937"/>
-                </a:solidFill>
-              </a:rPr>
-              <a:t>U002</a:t>
-            </a:r>
-          </a:p>
-        </p:txBody>
-      </p:sp>
-      <p:sp>
-        <p:nvSpPr>
-          <p:cNvPr id="78" name="cls-table-cell-2-1">
-            <a:extLst>
-              <a:ext uri="{FF2B5EF4-FFF2-40B4-BE49-F238E27FC236}">
-                <a16:creationId xmlns:a16="http://schemas.microsoft.com/office/drawing/2014/main" id="{17C43C37-7C94-47CB-80DB-C775285237DE}"/>
-              </a:ext>
-            </a:extLst>
-          </p:cNvPr>
-          <p:cNvSpPr>
-            <a:spLocks noGrp="1"/>
-          </p:cNvSpPr>
-          <p:nvPr/>
-        </p:nvSpPr>
-        <p:spPr>
-          <a:xfrm>
-            <a:off x="7181850" y="3124200"/>
-            <a:ext cx="723900" cy="361950"/>
-          </a:xfrm>
-          <a:prstGeom prst="rect">
-            <a:avLst/>
-          </a:prstGeom>
-          <a:solidFill>
-            <a:srgbClr val="FFFFFF"/>
-          </a:solidFill>
-          <a:ln w="9525">
-            <a:solidFill>
-              <a:srgbClr val="AEB8C7"/>
-            </a:solidFill>
-            <a:prstDash val="solid"/>
-          </a:ln>
-        </p:spPr>
-      </p:sp>
-      <p:sp>
-        <p:nvSpPr>
-          <p:cNvPr id="79" name="cls-table-cell-text-2-1">
-            <a:extLst>
-              <a:ext uri="{FF2B5EF4-FFF2-40B4-BE49-F238E27FC236}">
-                <a16:creationId xmlns:a16="http://schemas.microsoft.com/office/drawing/2014/main" id="{7C0F89E4-94A5-48E5-AE6F-1083895FB398}"/>
-              </a:ext>
-            </a:extLst>
-          </p:cNvPr>
-          <p:cNvSpPr>
-            <a:spLocks noGrp="1"/>
-          </p:cNvSpPr>
-          <p:nvPr/>
-        </p:nvSpPr>
-        <p:spPr>
-          <a:xfrm>
-            <a:off x="7210425" y="3190875"/>
-            <a:ext cx="666750" cy="257175"/>
-          </a:xfrm>
-          <a:prstGeom prst="rect">
-            <a:avLst/>
-          </a:prstGeom>
-          <a:noFill/>
-          <a:ln w="0">
-            <a:noFill/>
-            <a:prstDash val="solid"/>
-          </a:ln>
-        </p:spPr>
-        <p:txBody>
-          <a:bodyPr/>
-          <a:lstStyle/>
-          <a:p>
-            <a:pPr algn="ctr">
-              <a:defRPr sz="1050" b="0">
-                <a:solidFill>
-                  <a:srgbClr val="1F2937"/>
-                </a:solidFill>
-              </a:defRPr>
-            </a:pPr>
-            <a:r>
-              <a:rPr sz="1050" b="0">
-                <a:solidFill>
-                  <a:srgbClr val="1F2937"/>
-                </a:solidFill>
-              </a:rPr>
-              <a:t>P002</a:t>
-            </a:r>
-          </a:p>
-        </p:txBody>
-      </p:sp>
-      <p:sp>
-        <p:nvSpPr>
-          <p:cNvPr id="80" name="cls-table-cell-2-2">
-            <a:extLst>
-              <a:ext uri="{FF2B5EF4-FFF2-40B4-BE49-F238E27FC236}">
-                <a16:creationId xmlns:a16="http://schemas.microsoft.com/office/drawing/2014/main" id="{C7EF6252-CFDC-4054-BD43-C84F242843A2}"/>
-              </a:ext>
-            </a:extLst>
-          </p:cNvPr>
-          <p:cNvSpPr>
-            <a:spLocks noGrp="1"/>
-          </p:cNvSpPr>
-          <p:nvPr/>
-        </p:nvSpPr>
-        <p:spPr>
-          <a:xfrm>
-            <a:off x="7905750" y="3124200"/>
-            <a:ext cx="552450" cy="361950"/>
-          </a:xfrm>
-          <a:prstGeom prst="rect">
-            <a:avLst/>
-          </a:prstGeom>
-          <a:solidFill>
-            <a:srgbClr val="FFFFFF"/>
-          </a:solidFill>
-          <a:ln w="9525">
-            <a:solidFill>
-              <a:srgbClr val="AEB8C7"/>
-            </a:solidFill>
-            <a:prstDash val="solid"/>
-          </a:ln>
-        </p:spPr>
-      </p:sp>
-      <p:sp>
-        <p:nvSpPr>
-          <p:cNvPr id="81" name="cls-table-cell-text-2-2">
-            <a:extLst>
-              <a:ext uri="{FF2B5EF4-FFF2-40B4-BE49-F238E27FC236}">
-                <a16:creationId xmlns:a16="http://schemas.microsoft.com/office/drawing/2014/main" id="{FF88FCA7-1EB9-41BA-9C56-B715F72E06FB}"/>
-              </a:ext>
-            </a:extLst>
-          </p:cNvPr>
-          <p:cNvSpPr>
-            <a:spLocks noGrp="1"/>
-          </p:cNvSpPr>
-          <p:nvPr/>
-        </p:nvSpPr>
-        <p:spPr>
-          <a:xfrm>
-            <a:off x="7934325" y="3190875"/>
-            <a:ext cx="495300" cy="257175"/>
-          </a:xfrm>
-          <a:prstGeom prst="rect">
-            <a:avLst/>
-          </a:prstGeom>
-          <a:noFill/>
-          <a:ln w="0">
-            <a:noFill/>
-            <a:prstDash val="solid"/>
-          </a:ln>
-        </p:spPr>
-        <p:txBody>
-          <a:bodyPr/>
-          <a:lstStyle/>
-          <a:p>
-            <a:pPr algn="ctr">
-              <a:defRPr sz="1050" b="0">
-                <a:solidFill>
-                  <a:srgbClr val="1F2937"/>
-                </a:solidFill>
-              </a:defRPr>
-            </a:pPr>
-            <a:r>
-              <a:rPr sz="1050" b="0">
-                <a:solidFill>
-                  <a:srgbClr val="1F2937"/>
-                </a:solidFill>
-              </a:rPr>
-              <a:t>2</a:t>
-            </a:r>
-          </a:p>
-        </p:txBody>
-      </p:sp>
-      <p:sp>
-        <p:nvSpPr>
-          <p:cNvPr id="82" name="cls-table-cell-2-3">
-            <a:extLst>
-              <a:ext uri="{FF2B5EF4-FFF2-40B4-BE49-F238E27FC236}">
-                <a16:creationId xmlns:a16="http://schemas.microsoft.com/office/drawing/2014/main" id="{F18F0BC9-7B0B-4D43-AD5D-9E130A949B7A}"/>
-              </a:ext>
-            </a:extLst>
-          </p:cNvPr>
-          <p:cNvSpPr>
-            <a:spLocks noGrp="1"/>
-          </p:cNvSpPr>
-          <p:nvPr/>
-        </p:nvSpPr>
-        <p:spPr>
-          <a:xfrm>
-            <a:off x="8458200" y="3124200"/>
-            <a:ext cx="571500" cy="361950"/>
-          </a:xfrm>
-          <a:prstGeom prst="rect">
-            <a:avLst/>
-          </a:prstGeom>
-          <a:solidFill>
-            <a:srgbClr val="FFFFFF"/>
-          </a:solidFill>
-          <a:ln w="9525">
-            <a:solidFill>
-              <a:srgbClr val="AEB8C7"/>
-            </a:solidFill>
-            <a:prstDash val="solid"/>
-          </a:ln>
-        </p:spPr>
-      </p:sp>
-      <p:sp>
-        <p:nvSpPr>
-          <p:cNvPr id="83" name="cls-table-cell-text-2-3">
-            <a:extLst>
-              <a:ext uri="{FF2B5EF4-FFF2-40B4-BE49-F238E27FC236}">
-                <a16:creationId xmlns:a16="http://schemas.microsoft.com/office/drawing/2014/main" id="{97600974-EA06-4A8F-A2D8-D10427C756DD}"/>
-              </a:ext>
-            </a:extLst>
-          </p:cNvPr>
-          <p:cNvSpPr>
-            <a:spLocks noGrp="1"/>
-          </p:cNvSpPr>
-          <p:nvPr/>
-        </p:nvSpPr>
-        <p:spPr>
-          <a:xfrm>
-            <a:off x="8486775" y="3190875"/>
-            <a:ext cx="514350" cy="257175"/>
-          </a:xfrm>
-          <a:prstGeom prst="rect">
-            <a:avLst/>
-          </a:prstGeom>
-          <a:noFill/>
-          <a:ln w="0">
-            <a:noFill/>
-            <a:prstDash val="solid"/>
-          </a:ln>
-        </p:spPr>
-        <p:txBody>
-          <a:bodyPr/>
-          <a:lstStyle/>
-          <a:p>
-            <a:pPr algn="ctr">
-              <a:defRPr sz="1050" b="0">
-                <a:solidFill>
-                  <a:srgbClr val="1F2937"/>
-                </a:solidFill>
-              </a:defRPr>
-            </a:pPr>
-            <a:r>
-              <a:rPr sz="1050" b="0">
-                <a:solidFill>
-                  <a:srgbClr val="1F2937"/>
-                </a:solidFill>
-              </a:rPr>
-              <a:t>120</a:t>
-            </a:r>
-          </a:p>
-        </p:txBody>
-      </p:sp>
-      <p:sp>
-        <p:nvSpPr>
-          <p:cNvPr id="84" name="cls-table-cell-2-4">
-            <a:extLst>
-              <a:ext uri="{FF2B5EF4-FFF2-40B4-BE49-F238E27FC236}">
-                <a16:creationId xmlns:a16="http://schemas.microsoft.com/office/drawing/2014/main" id="{14B23AE5-D075-4202-8585-EFEFE9C40CAC}"/>
-              </a:ext>
-            </a:extLst>
-          </p:cNvPr>
-          <p:cNvSpPr>
-            <a:spLocks noGrp="1"/>
-          </p:cNvSpPr>
-          <p:nvPr/>
-        </p:nvSpPr>
-        <p:spPr>
-          <a:xfrm>
-            <a:off x="9029700" y="3124200"/>
-            <a:ext cx="609600" cy="361950"/>
-          </a:xfrm>
-          <a:prstGeom prst="rect">
-            <a:avLst/>
-          </a:prstGeom>
-          <a:solidFill>
-            <a:srgbClr val="FFFFFF"/>
-          </a:solidFill>
-          <a:ln w="9525">
-            <a:solidFill>
-              <a:srgbClr val="AEB8C7"/>
-            </a:solidFill>
-            <a:prstDash val="solid"/>
-          </a:ln>
-        </p:spPr>
-      </p:sp>
-      <p:sp>
-        <p:nvSpPr>
-          <p:cNvPr id="85" name="cls-table-cell-text-2-4">
-            <a:extLst>
-              <a:ext uri="{FF2B5EF4-FFF2-40B4-BE49-F238E27FC236}">
-                <a16:creationId xmlns:a16="http://schemas.microsoft.com/office/drawing/2014/main" id="{DB3B8A8F-98FD-4D15-852D-E3C28F33027D}"/>
-              </a:ext>
-            </a:extLst>
-          </p:cNvPr>
-          <p:cNvSpPr>
-            <a:spLocks noGrp="1"/>
-          </p:cNvSpPr>
-          <p:nvPr/>
-        </p:nvSpPr>
-        <p:spPr>
-          <a:xfrm>
-            <a:off x="9058275" y="3190875"/>
-            <a:ext cx="552450" cy="257175"/>
-          </a:xfrm>
-          <a:prstGeom prst="rect">
-            <a:avLst/>
-          </a:prstGeom>
-          <a:noFill/>
-          <a:ln w="0">
-            <a:noFill/>
-            <a:prstDash val="solid"/>
-          </a:ln>
-        </p:spPr>
-        <p:txBody>
-          <a:bodyPr/>
-          <a:lstStyle/>
-          <a:p>
-            <a:pPr algn="ctr">
-              <a:defRPr sz="1050" b="0">
-                <a:solidFill>
-                  <a:srgbClr val="1F2937"/>
-                </a:solidFill>
-              </a:defRPr>
-            </a:pPr>
-            <a:r>
-              <a:rPr sz="1050" b="0">
-                <a:solidFill>
-                  <a:srgbClr val="1F2937"/>
-                </a:solidFill>
-              </a:rPr>
-              <a:t>480</a:t>
-            </a:r>
-          </a:p>
-        </p:txBody>
-      </p:sp>
-      <p:sp>
-        <p:nvSpPr>
-          <p:cNvPr id="86" name="cls-table-cell-2-5">
-            <a:extLst>
-              <a:ext uri="{FF2B5EF4-FFF2-40B4-BE49-F238E27FC236}">
-                <a16:creationId xmlns:a16="http://schemas.microsoft.com/office/drawing/2014/main" id="{9E1A4F5A-383E-4E41-836E-E56FED71AB61}"/>
-              </a:ext>
-            </a:extLst>
-          </p:cNvPr>
-          <p:cNvSpPr>
-            <a:spLocks noGrp="1"/>
-          </p:cNvSpPr>
-          <p:nvPr/>
-        </p:nvSpPr>
-        <p:spPr>
-          <a:xfrm>
-            <a:off x="9639300" y="3124200"/>
-            <a:ext cx="800100" cy="361950"/>
-          </a:xfrm>
-          <a:prstGeom prst="rect">
-            <a:avLst/>
-          </a:prstGeom>
-          <a:solidFill>
-            <a:srgbClr val="FFFFFF"/>
-          </a:solidFill>
-          <a:ln w="9525">
-            <a:solidFill>
-              <a:srgbClr val="AEB8C7"/>
-            </a:solidFill>
-            <a:prstDash val="solid"/>
-          </a:ln>
-        </p:spPr>
-      </p:sp>
-      <p:sp>
-        <p:nvSpPr>
-          <p:cNvPr id="87" name="cls-table-cell-text-2-5">
-            <a:extLst>
-              <a:ext uri="{FF2B5EF4-FFF2-40B4-BE49-F238E27FC236}">
-                <a16:creationId xmlns:a16="http://schemas.microsoft.com/office/drawing/2014/main" id="{61AB29C4-8F61-4D61-A593-6000757EB560}"/>
-              </a:ext>
-            </a:extLst>
-          </p:cNvPr>
-          <p:cNvSpPr>
-            <a:spLocks noGrp="1"/>
-          </p:cNvSpPr>
-          <p:nvPr/>
-        </p:nvSpPr>
-        <p:spPr>
-          <a:xfrm>
-            <a:off x="9667875" y="3190875"/>
-            <a:ext cx="742950" cy="257175"/>
-          </a:xfrm>
-          <a:prstGeom prst="rect">
-            <a:avLst/>
-          </a:prstGeom>
-          <a:noFill/>
-          <a:ln w="0">
-            <a:noFill/>
-            <a:prstDash val="solid"/>
-          </a:ln>
-        </p:spPr>
-        <p:txBody>
-          <a:bodyPr/>
-          <a:lstStyle/>
-          <a:p>
-            <a:pPr algn="ctr">
-              <a:defRPr sz="1050" b="0">
-                <a:solidFill>
-                  <a:srgbClr val="1F2937"/>
-                </a:solidFill>
-              </a:defRPr>
-            </a:pPr>
-            <a:r>
-              <a:rPr sz="1050" b="0">
-                <a:solidFill>
-                  <a:srgbClr val="1F2937"/>
-                </a:solidFill>
-              </a:rPr>
-              <a:t>PayPal</a:t>
-            </a:r>
-          </a:p>
-        </p:txBody>
-      </p:sp>
-      <p:sp>
-        <p:nvSpPr>
-          <p:cNvPr id="88" name="cls-table-cell-2-6">
-            <a:extLst>
-              <a:ext uri="{FF2B5EF4-FFF2-40B4-BE49-F238E27FC236}">
-                <a16:creationId xmlns:a16="http://schemas.microsoft.com/office/drawing/2014/main" id="{E5B4C0DE-24D1-473E-98F9-1AB05A45F898}"/>
-              </a:ext>
-            </a:extLst>
-          </p:cNvPr>
-          <p:cNvSpPr>
-            <a:spLocks noGrp="1"/>
-          </p:cNvSpPr>
-          <p:nvPr/>
-        </p:nvSpPr>
-        <p:spPr>
-          <a:xfrm>
-            <a:off x="10439400" y="3124200"/>
-            <a:ext cx="819150" cy="361950"/>
-          </a:xfrm>
-          <a:prstGeom prst="rect">
-            <a:avLst/>
-          </a:prstGeom>
-          <a:solidFill>
-            <a:srgbClr val="FBF7FD"/>
-          </a:solidFill>
-          <a:ln w="9525">
-            <a:solidFill>
-              <a:srgbClr val="AEB8C7"/>
-            </a:solidFill>
-            <a:prstDash val="solid"/>
-          </a:ln>
-        </p:spPr>
-      </p:sp>
-      <p:sp>
-        <p:nvSpPr>
-          <p:cNvPr id="89" name="cls-table-cell-text-2-6">
-            <a:extLst>
-              <a:ext uri="{FF2B5EF4-FFF2-40B4-BE49-F238E27FC236}">
-                <a16:creationId xmlns:a16="http://schemas.microsoft.com/office/drawing/2014/main" id="{B4E8D68B-319D-4420-9B58-B9209FDB108B}"/>
-              </a:ext>
-            </a:extLst>
-          </p:cNvPr>
-          <p:cNvSpPr>
-            <a:spLocks noGrp="1"/>
-          </p:cNvSpPr>
-          <p:nvPr/>
-        </p:nvSpPr>
-        <p:spPr>
-          <a:xfrm>
-            <a:off x="10467975" y="3190875"/>
-            <a:ext cx="762000" cy="257175"/>
-          </a:xfrm>
-          <a:prstGeom prst="rect">
-            <a:avLst/>
-          </a:prstGeom>
-          <a:noFill/>
-          <a:ln w="0">
-            <a:noFill/>
-            <a:prstDash val="solid"/>
-          </a:ln>
-        </p:spPr>
-        <p:txBody>
-          <a:bodyPr/>
-          <a:lstStyle/>
-          <a:p>
-            <a:pPr algn="ctr">
-              <a:defRPr sz="1050" b="0">
-                <a:solidFill>
-                  <a:srgbClr val="1F2937"/>
-                </a:solidFill>
-              </a:defRPr>
-            </a:pPr>
-            <a:r>
-              <a:rPr sz="1050" b="0">
+              <a:rPr sz="1600" b="0">
                 <a:solidFill>
                   <a:srgbClr val="1F2937"/>
                 </a:solidFill>
@@ -5967,10 +5847,10 @@
       </p:grpSpPr>
       <p:sp>
         <p:nvSpPr>
-          <p:cNvPr id="85" name="rec-kicker">
-            <a:extLst>
-              <a:ext uri="{FF2B5EF4-FFF2-40B4-BE49-F238E27FC236}">
-                <a16:creationId xmlns:a16="http://schemas.microsoft.com/office/drawing/2014/main" id="{9DDF72D1-8743-4843-8D64-1FDB0D738EF3}"/>
+          <p:cNvPr id="94" name="cls-kicker">
+            <a:extLst>
+              <a:ext uri="{FF2B5EF4-FFF2-40B4-BE49-F238E27FC236}">
+                <a16:creationId xmlns:a16="http://schemas.microsoft.com/office/drawing/2014/main" id="{6E79B9BF-0763-43F2-9515-02A04B80AC2A}"/>
               </a:ext>
             </a:extLst>
           </p:cNvPr>
@@ -6010,17 +5890,17 @@
                   <a:srgbClr val="2F62C7"/>
                 </a:solidFill>
               </a:rPr>
-              <a:t>PROPUESTA 2 · SISTEMA DE RECOMENDACIÓN</a:t>
-            </a:r>
-          </a:p>
-        </p:txBody>
-      </p:sp>
-      <p:sp>
-        <p:nvSpPr>
-          <p:cNvPr id="2" name="rec-title">
-            <a:extLst>
-              <a:ext uri="{FF2B5EF4-FFF2-40B4-BE49-F238E27FC236}">
-                <a16:creationId xmlns:a16="http://schemas.microsoft.com/office/drawing/2014/main" id="{9079D89D-F13E-45A9-9762-F2B4F4718599}"/>
+              <a:t>PROPUESTA 1 · CLASIFICACIÓN</a:t>
+            </a:r>
+          </a:p>
+        </p:txBody>
+      </p:sp>
+      <p:sp>
+        <p:nvSpPr>
+          <p:cNvPr id="2" name="cls-title">
+            <a:extLst>
+              <a:ext uri="{FF2B5EF4-FFF2-40B4-BE49-F238E27FC236}">
+                <a16:creationId xmlns:a16="http://schemas.microsoft.com/office/drawing/2014/main" id="{B46ECD44-2054-44FA-9C18-090E438517AA}"/>
               </a:ext>
             </a:extLst>
           </p:cNvPr>
@@ -6060,8 +5940,326 @@
                   <a:srgbClr val="12356B"/>
                 </a:solidFill>
               </a:rPr>
-              <a:t>Recomendar productos mediante similitud entre ítems</a:t>
-            </a:r>
+              <a:t>Predecir qué pedidos tienen riesgo de cancelación</a:t>
+            </a:r>
+          </a:p>
+        </p:txBody>
+      </p:sp>
+      <p:sp>
+        <p:nvSpPr>
+          <p:cNvPr id="3" name="cls-page">
+            <a:extLst>
+              <a:ext uri="{FF2B5EF4-FFF2-40B4-BE49-F238E27FC236}">
+                <a16:creationId xmlns:a16="http://schemas.microsoft.com/office/drawing/2014/main" id="{66F30254-5C29-48DD-A2D8-506BF7A10CE0}"/>
+              </a:ext>
+            </a:extLst>
+          </p:cNvPr>
+          <p:cNvSpPr>
+            <a:spLocks noGrp="1"/>
+          </p:cNvSpPr>
+          <p:nvPr/>
+        </p:nvSpPr>
+        <p:spPr>
+          <a:xfrm>
+            <a:off x="11430000" y="6496050"/>
+            <a:ext cx="266700" cy="171450"/>
+          </a:xfrm>
+          <a:prstGeom prst="rect">
+            <a:avLst/>
+          </a:prstGeom>
+          <a:noFill/>
+          <a:ln w="0">
+            <a:noFill/>
+            <a:prstDash val="solid"/>
+          </a:ln>
+        </p:spPr>
+        <p:txBody>
+          <a:bodyPr/>
+          <a:lstStyle/>
+          <a:p>
+            <a:pPr algn="ctr">
+              <a:defRPr sz="975" b="0">
+                <a:solidFill>
+                  <a:srgbClr val="59677C"/>
+                </a:solidFill>
+              </a:defRPr>
+            </a:pPr>
+            <a:r>
+              <a:rPr sz="975" b="0">
+                <a:solidFill>
+                  <a:srgbClr val="59677C"/>
+                </a:solidFill>
+              </a:rPr>
+              <a:t>2</a:t>
+            </a:r>
+          </a:p>
+        </p:txBody>
+      </p:sp>
+      <p:pic>
+        <p:nvPicPr>
+          <p:cNvPr id="2050" name="Picture 2" descr="User attachment">
+            <a:extLst>
+              <a:ext uri="{FF2B5EF4-FFF2-40B4-BE49-F238E27FC236}">
+                <a16:creationId xmlns:a16="http://schemas.microsoft.com/office/drawing/2014/main" id="{B62D4696-4592-4EAD-8583-B2EC3A2B2122}"/>
+              </a:ext>
+            </a:extLst>
+          </p:cNvPr>
+          <p:cNvPicPr>
+            <a:picLocks noChangeAspect="1" noChangeArrowheads="1"/>
+          </p:cNvPicPr>
+          <p:nvPr/>
+        </p:nvPicPr>
+        <p:blipFill rotWithShape="1">
+          <a:blip r:embed="rId3">
+            <a:extLst>
+              <a:ext uri="{28A0092B-C50C-407E-A947-70E740481C1C}">
+                <a14:useLocalDpi xmlns:a14="http://schemas.microsoft.com/office/drawing/2010/main" val="0"/>
+              </a:ext>
+            </a:extLst>
+          </a:blip>
+          <a:srcRect b="66920"/>
+          <a:stretch/>
+        </p:blipFill>
+        <p:spPr bwMode="auto">
+          <a:xfrm>
+            <a:off x="2956780" y="933450"/>
+            <a:ext cx="6098721" cy="5764192"/>
+          </a:xfrm>
+          <a:prstGeom prst="rect">
+            <a:avLst/>
+          </a:prstGeom>
+          <a:noFill/>
+          <a:extLst>
+            <a:ext uri="{909E8E84-426E-40DD-AFC4-6F175D3DCCD1}">
+              <a14:hiddenFill xmlns:a14="http://schemas.microsoft.com/office/drawing/2010/main">
+                <a:solidFill>
+                  <a:srgbClr val="FFFFFF"/>
+                </a:solidFill>
+              </a14:hiddenFill>
+            </a:ext>
+          </a:extLst>
+        </p:spPr>
+      </p:pic>
+    </p:spTree>
+    <p:extLst>
+      <p:ext uri="{BB962C8B-B14F-4D97-AF65-F5344CB8AC3E}">
+        <p14:creationId xmlns:p14="http://schemas.microsoft.com/office/powerpoint/2010/main" val="1683394905"/>
+      </p:ext>
+    </p:extLst>
+  </p:cSld>
+  <p:clrMapOvr>
+    <a:masterClrMapping/>
+  </p:clrMapOvr>
+</p:sld>
+</file>
+
+<file path=ppt/slides/slide4.xml><?xml version="1.0" encoding="utf-8"?>
+<p:sld xmlns:a="http://schemas.openxmlformats.org/drawingml/2006/main" xmlns:r="http://schemas.openxmlformats.org/officeDocument/2006/relationships" xmlns:p="http://schemas.openxmlformats.org/presentationml/2006/main">
+  <p:cSld>
+    <p:bg>
+      <p:bgPr>
+        <a:solidFill>
+          <a:srgbClr val="F7F9FC"/>
+        </a:solidFill>
+        <a:effectLst/>
+      </p:bgPr>
+    </p:bg>
+    <p:spTree>
+      <p:nvGrpSpPr>
+        <p:cNvPr id="1" name=""/>
+        <p:cNvGrpSpPr/>
+        <p:nvPr/>
+      </p:nvGrpSpPr>
+      <p:grpSpPr>
+        <a:xfrm>
+          <a:off x="0" y="0"/>
+          <a:ext cx="0" cy="0"/>
+          <a:chOff x="0" y="0"/>
+          <a:chExt cx="0" cy="0"/>
+        </a:xfrm>
+      </p:grpSpPr>
+      <p:sp>
+        <p:nvSpPr>
+          <p:cNvPr id="85" name="rec-kicker">
+            <a:extLst>
+              <a:ext uri="{FF2B5EF4-FFF2-40B4-BE49-F238E27FC236}">
+                <a16:creationId xmlns:a16="http://schemas.microsoft.com/office/drawing/2014/main" id="{9DDF72D1-8743-4843-8D64-1FDB0D738EF3}"/>
+              </a:ext>
+            </a:extLst>
+          </p:cNvPr>
+          <p:cNvSpPr>
+            <a:spLocks noGrp="1"/>
+          </p:cNvSpPr>
+          <p:nvPr/>
+        </p:nvSpPr>
+        <p:spPr>
+          <a:xfrm>
+            <a:off x="476250" y="190500"/>
+            <a:ext cx="4762500" cy="228600"/>
+          </a:xfrm>
+          <a:prstGeom prst="rect">
+            <a:avLst/>
+          </a:prstGeom>
+          <a:noFill/>
+          <a:ln w="0">
+            <a:noFill/>
+            <a:prstDash val="solid"/>
+          </a:ln>
+        </p:spPr>
+        <p:txBody>
+          <a:bodyPr/>
+          <a:lstStyle/>
+          <a:p>
+            <a:pPr algn="l">
+              <a:defRPr sz="1200" b="1">
+                <a:solidFill>
+                  <a:srgbClr val="2F62C7"/>
+                </a:solidFill>
+              </a:defRPr>
+            </a:pPr>
+            <a:r>
+              <a:rPr sz="1200" b="1">
+                <a:solidFill>
+                  <a:srgbClr val="2F62C7"/>
+                </a:solidFill>
+              </a:rPr>
+              <a:t>PROPUESTA 2 · SISTEMA DE RECOMENDACIÓN</a:t>
+            </a:r>
+          </a:p>
+        </p:txBody>
+      </p:sp>
+      <p:sp>
+        <p:nvSpPr>
+          <p:cNvPr id="2" name="rec-title">
+            <a:extLst>
+              <a:ext uri="{FF2B5EF4-FFF2-40B4-BE49-F238E27FC236}">
+                <a16:creationId xmlns:a16="http://schemas.microsoft.com/office/drawing/2014/main" id="{9079D89D-F13E-45A9-9762-F2B4F4718599}"/>
+              </a:ext>
+            </a:extLst>
+          </p:cNvPr>
+          <p:cNvSpPr>
+            <a:spLocks noGrp="1"/>
+          </p:cNvSpPr>
+          <p:nvPr/>
+        </p:nvSpPr>
+        <p:spPr>
+          <a:xfrm>
+            <a:off x="476250" y="476250"/>
+            <a:ext cx="11239500" cy="457200"/>
+          </a:xfrm>
+          <a:prstGeom prst="rect">
+            <a:avLst/>
+          </a:prstGeom>
+          <a:noFill/>
+          <a:ln w="0">
+            <a:noFill/>
+            <a:prstDash val="solid"/>
+          </a:ln>
+        </p:spPr>
+        <p:txBody>
+          <a:bodyPr/>
+          <a:lstStyle/>
+          <a:p>
+            <a:pPr algn="l">
+              <a:defRPr sz="2625" b="1">
+                <a:solidFill>
+                  <a:srgbClr val="12356B"/>
+                </a:solidFill>
+              </a:defRPr>
+            </a:pPr>
+            <a:r>
+              <a:rPr sz="2625" b="1" dirty="0" err="1">
+                <a:solidFill>
+                  <a:srgbClr val="12356B"/>
+                </a:solidFill>
+              </a:rPr>
+              <a:t>Recomendar</a:t>
+            </a:r>
+            <a:r>
+              <a:rPr sz="2625" b="1" dirty="0">
+                <a:solidFill>
+                  <a:srgbClr val="12356B"/>
+                </a:solidFill>
+              </a:rPr>
+              <a:t> </a:t>
+            </a:r>
+            <a:r>
+              <a:rPr sz="2625" b="1" dirty="0" err="1">
+                <a:solidFill>
+                  <a:srgbClr val="12356B"/>
+                </a:solidFill>
+              </a:rPr>
+              <a:t>productos</a:t>
+            </a:r>
+            <a:r>
+              <a:rPr sz="2625" b="1" dirty="0">
+                <a:solidFill>
+                  <a:srgbClr val="12356B"/>
+                </a:solidFill>
+              </a:rPr>
+              <a:t> </a:t>
+            </a:r>
+            <a:r>
+              <a:rPr lang="es-MX" sz="2625" b="1" dirty="0">
+                <a:solidFill>
+                  <a:srgbClr val="12356B"/>
+                </a:solidFill>
+              </a:rPr>
+              <a:t>por</a:t>
+            </a:r>
+            <a:r>
+              <a:rPr sz="2625" b="1" dirty="0">
+                <a:solidFill>
+                  <a:srgbClr val="12356B"/>
+                </a:solidFill>
+              </a:rPr>
+              <a:t> </a:t>
+            </a:r>
+            <a:r>
+              <a:rPr lang="es-MX" sz="2625" b="1" dirty="0">
+                <a:solidFill>
+                  <a:srgbClr val="12356B"/>
+                </a:solidFill>
+              </a:rPr>
+              <a:t>filtrado colaborativo basado</a:t>
+            </a:r>
+            <a:r>
+              <a:rPr sz="2625" b="1" dirty="0">
+                <a:solidFill>
+                  <a:srgbClr val="12356B"/>
+                </a:solidFill>
+              </a:rPr>
+              <a:t> e</a:t>
+            </a:r>
+            <a:r>
+              <a:rPr lang="es-MX" sz="2625" b="1" dirty="0">
+                <a:solidFill>
+                  <a:srgbClr val="12356B"/>
+                </a:solidFill>
+              </a:rPr>
+              <a:t>n</a:t>
+            </a:r>
+            <a:r>
+              <a:rPr sz="2625" b="1" dirty="0">
+                <a:solidFill>
+                  <a:srgbClr val="12356B"/>
+                </a:solidFill>
+              </a:rPr>
+              <a:t> </a:t>
+            </a:r>
+            <a:r>
+              <a:rPr sz="2625" b="1" dirty="0" err="1">
+                <a:solidFill>
+                  <a:srgbClr val="12356B"/>
+                </a:solidFill>
+              </a:rPr>
+              <a:t>ítems</a:t>
+            </a:r>
+            <a:endParaRPr sz="2625" b="1" dirty="0">
+              <a:solidFill>
+                <a:srgbClr val="12356B"/>
+              </a:solidFill>
+            </a:endParaRPr>
           </a:p>
         </p:txBody>
       </p:sp>
@@ -6395,7 +6593,7 @@
               </a:defRPr>
             </a:pPr>
             <a:r>
-              <a:rPr sz="638" b="0" dirty="0">
+              <a:rPr sz="1000" b="0" dirty="0">
                 <a:solidFill>
                   <a:srgbClr val="1F2937"/>
                 </a:solidFill>
@@ -6412,14 +6610,14 @@
               </a:defRPr>
             </a:pPr>
             <a:r>
-              <a:rPr sz="638" b="0" dirty="0" err="1">
+              <a:rPr sz="1000" b="0" dirty="0" err="1">
                 <a:solidFill>
                   <a:srgbClr val="1F2937"/>
                 </a:solidFill>
               </a:rPr>
               <a:t>nombre</a:t>
             </a:r>
-            <a:endParaRPr sz="638" b="0" dirty="0">
+            <a:endParaRPr sz="1000" b="0" dirty="0">
               <a:solidFill>
                 <a:srgbClr val="1F2937"/>
               </a:solidFill>
@@ -6434,7 +6632,7 @@
               </a:defRPr>
             </a:pPr>
             <a:r>
-              <a:rPr sz="638" b="0" dirty="0">
+              <a:rPr sz="1000" b="0" dirty="0">
                 <a:solidFill>
                   <a:srgbClr val="1F2937"/>
                 </a:solidFill>
@@ -6451,7 +6649,7 @@
               </a:defRPr>
             </a:pPr>
             <a:r>
-              <a:rPr sz="638" b="0" dirty="0">
+              <a:rPr sz="1000" b="0" dirty="0">
                 <a:solidFill>
                   <a:srgbClr val="1F2937"/>
                 </a:solidFill>
@@ -6468,7 +6666,7 @@
               </a:defRPr>
             </a:pPr>
             <a:r>
-              <a:rPr sz="638" b="0" dirty="0">
+              <a:rPr sz="1000" b="0" dirty="0">
                 <a:solidFill>
                   <a:srgbClr val="1F2937"/>
                 </a:solidFill>
@@ -6485,7 +6683,7 @@
               </a:defRPr>
             </a:pPr>
             <a:r>
-              <a:rPr sz="638" b="0" dirty="0">
+              <a:rPr sz="1000" b="0" dirty="0">
                 <a:solidFill>
                   <a:srgbClr val="1F2937"/>
                 </a:solidFill>
@@ -6502,7 +6700,7 @@
               </a:defRPr>
             </a:pPr>
             <a:r>
-              <a:rPr sz="638" b="0" dirty="0">
+              <a:rPr sz="1000" b="0" dirty="0">
                 <a:solidFill>
                   <a:srgbClr val="1F2937"/>
                 </a:solidFill>
@@ -6519,14 +6717,14 @@
               </a:defRPr>
             </a:pPr>
             <a:r>
-              <a:rPr sz="638" b="0" dirty="0" err="1">
+              <a:rPr sz="1000" b="0" dirty="0" err="1">
                 <a:solidFill>
                   <a:srgbClr val="1F2937"/>
                 </a:solidFill>
               </a:rPr>
               <a:t>telefono</a:t>
             </a:r>
-            <a:endParaRPr sz="638" b="0" dirty="0">
+            <a:endParaRPr sz="1000" b="0" dirty="0">
               <a:solidFill>
                 <a:srgbClr val="1F2937"/>
               </a:solidFill>
@@ -6541,14 +6739,14 @@
               </a:defRPr>
             </a:pPr>
             <a:r>
-              <a:rPr sz="638" b="0" dirty="0" err="1">
+              <a:rPr sz="1000" b="0" dirty="0" err="1">
                 <a:solidFill>
                   <a:srgbClr val="1F2937"/>
                 </a:solidFill>
               </a:rPr>
               <a:t>preguntaSecreta</a:t>
             </a:r>
-            <a:endParaRPr sz="638" b="0" dirty="0">
+            <a:endParaRPr sz="1000" b="0" dirty="0">
               <a:solidFill>
                 <a:srgbClr val="1F2937"/>
               </a:solidFill>
@@ -6563,14 +6761,14 @@
               </a:defRPr>
             </a:pPr>
             <a:r>
-              <a:rPr sz="638" b="0" dirty="0" err="1">
+              <a:rPr sz="1000" b="0" dirty="0" err="1">
                 <a:solidFill>
                   <a:srgbClr val="1F2937"/>
                 </a:solidFill>
               </a:rPr>
               <a:t>respuestaSecreta</a:t>
             </a:r>
-            <a:endParaRPr sz="638" b="0" dirty="0">
+            <a:endParaRPr sz="1000" b="0" dirty="0">
               <a:solidFill>
                 <a:srgbClr val="1F2937"/>
               </a:solidFill>
@@ -6585,14 +6783,14 @@
               </a:defRPr>
             </a:pPr>
             <a:r>
-              <a:rPr sz="638" b="0" dirty="0" err="1">
+              <a:rPr sz="1000" b="0" dirty="0" err="1">
                 <a:solidFill>
                   <a:srgbClr val="1F2937"/>
                 </a:solidFill>
               </a:rPr>
               <a:t>rol</a:t>
             </a:r>
-            <a:endParaRPr sz="638" b="0" dirty="0">
+            <a:endParaRPr sz="1000" b="0" dirty="0">
               <a:solidFill>
                 <a:srgbClr val="1F2937"/>
               </a:solidFill>
@@ -6607,7 +6805,7 @@
               </a:defRPr>
             </a:pPr>
             <a:r>
-              <a:rPr lang="es-MX" sz="638" b="0" dirty="0">
+              <a:rPr lang="es-MX" sz="1000" b="0" dirty="0">
                 <a:solidFill>
                   <a:srgbClr val="1F2937"/>
                 </a:solidFill>
@@ -6838,7 +7036,7 @@
               </a:defRPr>
             </a:pPr>
             <a:r>
-              <a:rPr sz="638" b="0" dirty="0">
+              <a:rPr sz="1000" b="0" dirty="0">
                 <a:solidFill>
                   <a:srgbClr val="1F2937"/>
                 </a:solidFill>
@@ -6855,7 +7053,7 @@
               </a:defRPr>
             </a:pPr>
             <a:r>
-              <a:rPr sz="638" b="0" dirty="0" err="1">
+              <a:rPr sz="1000" b="0" dirty="0" err="1">
                 <a:solidFill>
                   <a:srgbClr val="1F2937"/>
                 </a:solidFill>
@@ -6863,7 +7061,7 @@
               <a:t>usuario</a:t>
             </a:r>
             <a:r>
-              <a:rPr sz="638" b="0" dirty="0">
+              <a:rPr sz="1000" b="0" dirty="0">
                 <a:solidFill>
                   <a:srgbClr val="1F2937"/>
                 </a:solidFill>
@@ -6880,7 +7078,7 @@
               </a:defRPr>
             </a:pPr>
             <a:r>
-              <a:rPr sz="638" b="0" dirty="0" err="1">
+              <a:rPr sz="1000" b="0" dirty="0" err="1">
                 <a:solidFill>
                   <a:srgbClr val="1F2937"/>
                 </a:solidFill>
@@ -6888,7 +7086,7 @@
               <a:t>productos</a:t>
             </a:r>
             <a:r>
-              <a:rPr sz="638" b="0" dirty="0">
+              <a:rPr sz="1000" b="0" dirty="0">
                 <a:solidFill>
                   <a:srgbClr val="1F2937"/>
                 </a:solidFill>
@@ -6905,14 +7103,14 @@
               </a:defRPr>
             </a:pPr>
             <a:r>
-              <a:rPr sz="638" b="0" dirty="0" err="1">
+              <a:rPr sz="1000" b="0" dirty="0" err="1">
                 <a:solidFill>
                   <a:srgbClr val="1F2937"/>
                 </a:solidFill>
               </a:rPr>
               <a:t>metodoPago</a:t>
             </a:r>
-            <a:endParaRPr lang="es-MX" sz="638" b="0" dirty="0">
+            <a:endParaRPr lang="es-MX" sz="1000" b="0" dirty="0">
               <a:solidFill>
                 <a:srgbClr val="1F2937"/>
               </a:solidFill>
@@ -6927,7 +7125,7 @@
               </a:defRPr>
             </a:pPr>
             <a:r>
-              <a:rPr lang="es-MX" sz="638" b="0" dirty="0">
+              <a:rPr lang="es-MX" sz="1000" b="0" dirty="0">
                 <a:solidFill>
                   <a:srgbClr val="1F2937"/>
                 </a:solidFill>
@@ -6935,14 +7133,14 @@
               <a:t>total</a:t>
             </a:r>
             <a:br>
-              <a:rPr lang="es-MX" sz="638" b="0" dirty="0">
+              <a:rPr lang="es-MX" sz="1000" b="0" dirty="0">
                 <a:solidFill>
                   <a:srgbClr val="1F2937"/>
                 </a:solidFill>
               </a:rPr>
             </a:br>
             <a:r>
-              <a:rPr lang="es-MX" sz="638" b="0" dirty="0">
+              <a:rPr lang="es-MX" sz="1000" b="0" dirty="0">
                 <a:solidFill>
                   <a:srgbClr val="1F2937"/>
                 </a:solidFill>
@@ -6959,14 +7157,14 @@
               </a:defRPr>
             </a:pPr>
             <a:r>
-              <a:rPr lang="es-MX" sz="638" b="0" dirty="0" err="1">
+              <a:rPr lang="es-MX" sz="1000" b="0" dirty="0" err="1">
                 <a:solidFill>
                   <a:srgbClr val="1F2937"/>
                 </a:solidFill>
               </a:rPr>
               <a:t>costoEnvio</a:t>
             </a:r>
-            <a:endParaRPr lang="es-MX" sz="638" b="0" dirty="0">
+            <a:endParaRPr lang="es-MX" sz="1000" b="0" dirty="0">
               <a:solidFill>
                 <a:srgbClr val="1F2937"/>
               </a:solidFill>
@@ -6981,7 +7179,7 @@
               </a:defRPr>
             </a:pPr>
             <a:r>
-              <a:rPr lang="es-MX" sz="638" b="0" dirty="0">
+              <a:rPr lang="es-MX" sz="1000" b="0" dirty="0">
                 <a:solidFill>
                   <a:srgbClr val="1F2937"/>
                 </a:solidFill>
@@ -6998,14 +7196,14 @@
               </a:defRPr>
             </a:pPr>
             <a:r>
-              <a:rPr lang="es-MX" sz="638" b="0" dirty="0" err="1">
+              <a:rPr lang="es-MX" sz="1000" b="0" dirty="0" err="1">
                 <a:solidFill>
                   <a:srgbClr val="1F2937"/>
                 </a:solidFill>
               </a:rPr>
               <a:t>createdAt</a:t>
             </a:r>
-            <a:endParaRPr lang="es-MX" sz="638" b="0" dirty="0">
+            <a:endParaRPr lang="es-MX" sz="1000" b="0" dirty="0">
               <a:solidFill>
                 <a:srgbClr val="1F2937"/>
               </a:solidFill>
@@ -7020,14 +7218,14 @@
               </a:defRPr>
             </a:pPr>
             <a:r>
-              <a:rPr lang="es-MX" sz="638" b="0" dirty="0" err="1">
+              <a:rPr lang="es-MX" sz="1000" b="0" dirty="0" err="1">
                 <a:solidFill>
                   <a:srgbClr val="1F2937"/>
                 </a:solidFill>
               </a:rPr>
               <a:t>updatedAt</a:t>
             </a:r>
-            <a:endParaRPr lang="es-MX" sz="638" b="0" dirty="0">
+            <a:endParaRPr lang="es-MX" sz="1000" b="0" dirty="0">
               <a:solidFill>
                 <a:srgbClr val="1F2937"/>
               </a:solidFill>
@@ -7113,7 +7311,7 @@
         <p:spPr>
           <a:xfrm>
             <a:off x="781050" y="4381500"/>
-            <a:ext cx="3848100" cy="1257300"/>
+            <a:ext cx="3848100" cy="1543050"/>
           </a:xfrm>
           <a:prstGeom prst="roundRect">
             <a:avLst>
@@ -7232,7 +7430,7 @@
         </p:nvSpPr>
         <p:spPr>
           <a:xfrm>
-            <a:off x="857250" y="4714875"/>
+            <a:off x="857250" y="4686300"/>
             <a:ext cx="1771650" cy="895350"/>
           </a:xfrm>
           <a:prstGeom prst="rect">
@@ -7256,7 +7454,7 @@
               </a:defRPr>
             </a:pPr>
             <a:r>
-              <a:rPr sz="638" b="0">
+              <a:rPr sz="800" b="0" dirty="0">
                 <a:solidFill>
                   <a:srgbClr val="1F2937"/>
                 </a:solidFill>
@@ -7273,13 +7471,18 @@
               </a:defRPr>
             </a:pPr>
             <a:r>
-              <a:rPr sz="638" b="0">
+              <a:rPr sz="800" b="0" dirty="0" err="1">
                 <a:solidFill>
                   <a:srgbClr val="1F2937"/>
                 </a:solidFill>
               </a:rPr>
               <a:t>nombre</a:t>
             </a:r>
+            <a:endParaRPr sz="800" b="0" dirty="0">
+              <a:solidFill>
+                <a:srgbClr val="1F2937"/>
+              </a:solidFill>
+            </a:endParaRPr>
           </a:p>
           <a:p>
             <a:pPr algn="l">
@@ -7290,13 +7493,18 @@
               </a:defRPr>
             </a:pPr>
             <a:r>
-              <a:rPr sz="638" b="0">
+              <a:rPr sz="800" b="0" dirty="0" err="1">
                 <a:solidFill>
                   <a:srgbClr val="1F2937"/>
                 </a:solidFill>
               </a:rPr>
               <a:t>descripcion</a:t>
             </a:r>
+            <a:endParaRPr sz="800" b="0" dirty="0">
+              <a:solidFill>
+                <a:srgbClr val="1F2937"/>
+              </a:solidFill>
+            </a:endParaRPr>
           </a:p>
           <a:p>
             <a:pPr algn="l">
@@ -7307,13 +7515,18 @@
               </a:defRPr>
             </a:pPr>
             <a:r>
-              <a:rPr sz="638" b="0">
+              <a:rPr sz="800" b="0" dirty="0" err="1">
                 <a:solidFill>
                   <a:srgbClr val="1F2937"/>
                 </a:solidFill>
               </a:rPr>
               <a:t>precioNormal</a:t>
             </a:r>
+            <a:endParaRPr sz="800" b="0" dirty="0">
+              <a:solidFill>
+                <a:srgbClr val="1F2937"/>
+              </a:solidFill>
+            </a:endParaRPr>
           </a:p>
           <a:p>
             <a:pPr algn="l">
@@ -7324,13 +7537,18 @@
               </a:defRPr>
             </a:pPr>
             <a:r>
-              <a:rPr sz="638" b="0">
+              <a:rPr sz="800" b="0" dirty="0" err="1">
                 <a:solidFill>
                   <a:srgbClr val="1F2937"/>
                 </a:solidFill>
               </a:rPr>
               <a:t>skuNormal</a:t>
             </a:r>
+            <a:endParaRPr sz="800" b="0" dirty="0">
+              <a:solidFill>
+                <a:srgbClr val="1F2937"/>
+              </a:solidFill>
+            </a:endParaRPr>
           </a:p>
           <a:p>
             <a:pPr algn="l">
@@ -7341,13 +7559,18 @@
               </a:defRPr>
             </a:pPr>
             <a:r>
-              <a:rPr sz="638" b="0">
+              <a:rPr sz="800" b="0" dirty="0" err="1">
                 <a:solidFill>
                   <a:srgbClr val="1F2937"/>
                 </a:solidFill>
               </a:rPr>
               <a:t>precioMayoreo</a:t>
             </a:r>
+            <a:endParaRPr sz="800" b="0" dirty="0">
+              <a:solidFill>
+                <a:srgbClr val="1F2937"/>
+              </a:solidFill>
+            </a:endParaRPr>
           </a:p>
           <a:p>
             <a:pPr algn="l">
@@ -7358,13 +7581,18 @@
               </a:defRPr>
             </a:pPr>
             <a:r>
-              <a:rPr sz="638" b="0">
+              <a:rPr sz="800" b="0" dirty="0" err="1">
                 <a:solidFill>
                   <a:srgbClr val="1F2937"/>
                 </a:solidFill>
               </a:rPr>
               <a:t>skuMayoreo</a:t>
             </a:r>
+            <a:endParaRPr sz="800" b="0" dirty="0">
+              <a:solidFill>
+                <a:srgbClr val="1F2937"/>
+              </a:solidFill>
+            </a:endParaRPr>
           </a:p>
           <a:p>
             <a:pPr algn="l">
@@ -7375,13 +7603,18 @@
               </a:defRPr>
             </a:pPr>
             <a:r>
-              <a:rPr sz="638" b="0">
+              <a:rPr sz="800" b="0" dirty="0" err="1">
                 <a:solidFill>
                   <a:srgbClr val="1F2937"/>
                 </a:solidFill>
               </a:rPr>
               <a:t>precioCaja</a:t>
             </a:r>
+            <a:endParaRPr sz="800" b="0" dirty="0">
+              <a:solidFill>
+                <a:srgbClr val="1F2937"/>
+              </a:solidFill>
+            </a:endParaRPr>
           </a:p>
           <a:p>
             <a:pPr algn="l">
@@ -7392,13 +7625,18 @@
               </a:defRPr>
             </a:pPr>
             <a:r>
-              <a:rPr sz="638" b="0">
+              <a:rPr sz="800" b="0" dirty="0" err="1">
                 <a:solidFill>
                   <a:srgbClr val="1F2937"/>
                 </a:solidFill>
               </a:rPr>
               <a:t>skuCaja</a:t>
             </a:r>
+            <a:endParaRPr sz="800" b="0" dirty="0">
+              <a:solidFill>
+                <a:srgbClr val="1F2937"/>
+              </a:solidFill>
+            </a:endParaRPr>
           </a:p>
         </p:txBody>
       </p:sp>
@@ -7442,7 +7680,7 @@
               </a:defRPr>
             </a:pPr>
             <a:r>
-              <a:rPr sz="638" b="0">
+              <a:rPr sz="900" b="0" dirty="0">
                 <a:solidFill>
                   <a:srgbClr val="1F2937"/>
                 </a:solidFill>
@@ -7459,12 +7697,20 @@
               </a:defRPr>
             </a:pPr>
             <a:r>
-              <a:rPr sz="638" b="0">
-                <a:solidFill>
-                  <a:srgbClr val="1F2937"/>
-                </a:solidFill>
-              </a:rPr>
-              <a:t>marca · FK</a:t>
+              <a:rPr sz="900" b="0" dirty="0" err="1">
+                <a:solidFill>
+                  <a:srgbClr val="1F2937"/>
+                </a:solidFill>
+              </a:rPr>
+              <a:t>marca</a:t>
+            </a:r>
+            <a:r>
+              <a:rPr sz="900" b="0" dirty="0">
+                <a:solidFill>
+                  <a:srgbClr val="1F2937"/>
+                </a:solidFill>
+              </a:rPr>
+              <a:t> · FK</a:t>
             </a:r>
           </a:p>
           <a:p>
@@ -7476,12 +7722,20 @@
               </a:defRPr>
             </a:pPr>
             <a:r>
-              <a:rPr sz="638" b="0">
-                <a:solidFill>
-                  <a:srgbClr val="1F2937"/>
-                </a:solidFill>
-              </a:rPr>
-              <a:t>familia · FK</a:t>
+              <a:rPr sz="900" b="0" dirty="0" err="1">
+                <a:solidFill>
+                  <a:srgbClr val="1F2937"/>
+                </a:solidFill>
+              </a:rPr>
+              <a:t>familia</a:t>
+            </a:r>
+            <a:r>
+              <a:rPr sz="900" b="0" dirty="0">
+                <a:solidFill>
+                  <a:srgbClr val="1F2937"/>
+                </a:solidFill>
+              </a:rPr>
+              <a:t> · FK</a:t>
             </a:r>
           </a:p>
           <a:p>
@@ -7493,13 +7747,18 @@
               </a:defRPr>
             </a:pPr>
             <a:r>
-              <a:rPr sz="638" b="0">
+              <a:rPr sz="900" b="0" dirty="0" err="1">
                 <a:solidFill>
                   <a:srgbClr val="1F2937"/>
                 </a:solidFill>
               </a:rPr>
               <a:t>activo</a:t>
             </a:r>
+            <a:endParaRPr sz="900" b="0" dirty="0">
+              <a:solidFill>
+                <a:srgbClr val="1F2937"/>
+              </a:solidFill>
+            </a:endParaRPr>
           </a:p>
           <a:p>
             <a:pPr algn="l">
@@ -7510,13 +7769,18 @@
               </a:defRPr>
             </a:pPr>
             <a:r>
-              <a:rPr sz="638" b="0">
+              <a:rPr sz="900" b="0" dirty="0" err="1">
                 <a:solidFill>
                   <a:srgbClr val="1F2937"/>
                 </a:solidFill>
               </a:rPr>
               <a:t>imagenUrl</a:t>
             </a:r>
+            <a:endParaRPr sz="900" b="0" dirty="0">
+              <a:solidFill>
+                <a:srgbClr val="1F2937"/>
+              </a:solidFill>
+            </a:endParaRPr>
           </a:p>
           <a:p>
             <a:pPr algn="l">
@@ -7527,13 +7791,18 @@
               </a:defRPr>
             </a:pPr>
             <a:r>
-              <a:rPr sz="638" b="0">
+              <a:rPr sz="900" b="0" dirty="0" err="1">
                 <a:solidFill>
                   <a:srgbClr val="1F2937"/>
                 </a:solidFill>
               </a:rPr>
               <a:t>createdAt</a:t>
             </a:r>
+            <a:endParaRPr sz="900" b="0" dirty="0">
+              <a:solidFill>
+                <a:srgbClr val="1F2937"/>
+              </a:solidFill>
+            </a:endParaRPr>
           </a:p>
           <a:p>
             <a:pPr algn="l">
@@ -7544,13 +7813,18 @@
               </a:defRPr>
             </a:pPr>
             <a:r>
-              <a:rPr sz="638" b="0">
+              <a:rPr sz="900" b="0" dirty="0" err="1">
                 <a:solidFill>
                   <a:srgbClr val="1F2937"/>
                 </a:solidFill>
               </a:rPr>
               <a:t>updatedAt</a:t>
             </a:r>
+            <a:endParaRPr sz="900" b="0" dirty="0">
+              <a:solidFill>
+                <a:srgbClr val="1F2937"/>
+              </a:solidFill>
+            </a:endParaRPr>
           </a:p>
           <a:p>
             <a:pPr algn="l">
@@ -7561,7 +7835,7 @@
               </a:defRPr>
             </a:pPr>
             <a:r>
-              <a:rPr sz="638" b="0">
+              <a:rPr sz="900" b="0" dirty="0">
                 <a:solidFill>
                   <a:srgbClr val="1F2937"/>
                 </a:solidFill>
@@ -7586,9 +7860,9 @@
           <p:nvPr/>
         </p:nvSpPr>
         <p:spPr>
-          <a:xfrm>
-            <a:off x="2667000" y="4705350"/>
-            <a:ext cx="9525" cy="885825"/>
+          <a:xfrm flipH="1">
+            <a:off x="2621281" y="4705350"/>
+            <a:ext cx="45719" cy="1196340"/>
           </a:xfrm>
           <a:prstGeom prst="rect">
             <a:avLst/>
@@ -7606,91 +7880,6 @@
       </p:sp>
       <p:sp>
         <p:nvSpPr>
-          <p:cNvPr id="25" name="rec-keys-legend">
-            <a:extLst>
-              <a:ext uri="{FF2B5EF4-FFF2-40B4-BE49-F238E27FC236}">
-                <a16:creationId xmlns:a16="http://schemas.microsoft.com/office/drawing/2014/main" id="{8A4BEE7F-9B57-48DD-9C9F-D6EDC242ED6D}"/>
-              </a:ext>
-            </a:extLst>
-          </p:cNvPr>
-          <p:cNvSpPr>
-            <a:spLocks noGrp="1"/>
-          </p:cNvSpPr>
-          <p:nvPr/>
-        </p:nvSpPr>
-        <p:spPr>
-          <a:xfrm>
-            <a:off x="781050" y="5695950"/>
-            <a:ext cx="3848100" cy="171450"/>
-          </a:xfrm>
-          <a:prstGeom prst="roundRect">
-            <a:avLst>
-              <a:gd name="adj" fmla="val 11111"/>
-            </a:avLst>
-          </a:prstGeom>
-          <a:solidFill>
-            <a:srgbClr val="F2F6FC"/>
-          </a:solidFill>
-          <a:ln w="9525">
-            <a:solidFill>
-              <a:srgbClr val="7FA0D8"/>
-            </a:solidFill>
-            <a:prstDash val="solid"/>
-          </a:ln>
-        </p:spPr>
-      </p:sp>
-      <p:sp>
-        <p:nvSpPr>
-          <p:cNvPr id="26" name="rec-keys-legend-text">
-            <a:extLst>
-              <a:ext uri="{FF2B5EF4-FFF2-40B4-BE49-F238E27FC236}">
-                <a16:creationId xmlns:a16="http://schemas.microsoft.com/office/drawing/2014/main" id="{EFE1F3EA-18C4-448D-A47E-49A9C58ABBF1}"/>
-              </a:ext>
-            </a:extLst>
-          </p:cNvPr>
-          <p:cNvSpPr>
-            <a:spLocks noGrp="1"/>
-          </p:cNvSpPr>
-          <p:nvPr/>
-        </p:nvSpPr>
-        <p:spPr>
-          <a:xfrm>
-            <a:off x="838200" y="5715000"/>
-            <a:ext cx="3733800" cy="133350"/>
-          </a:xfrm>
-          <a:prstGeom prst="rect">
-            <a:avLst/>
-          </a:prstGeom>
-          <a:noFill/>
-          <a:ln w="0">
-            <a:noFill/>
-            <a:prstDash val="solid"/>
-          </a:ln>
-        </p:spPr>
-        <p:txBody>
-          <a:bodyPr/>
-          <a:lstStyle/>
-          <a:p>
-            <a:pPr algn="ctr">
-              <a:defRPr sz="750" b="1">
-                <a:solidFill>
-                  <a:srgbClr val="12356B"/>
-                </a:solidFill>
-              </a:defRPr>
-            </a:pPr>
-            <a:r>
-              <a:rPr sz="750" b="1">
-                <a:solidFill>
-                  <a:srgbClr val="12356B"/>
-                </a:solidFill>
-              </a:rPr>
-              <a:t>PK: _id   ·   FK: ObjectId   ·   [ ]: arreglo   ·   ↳: campo anidado</a:t>
-            </a:r>
-          </a:p>
-        </p:txBody>
-      </p:sp>
-      <p:sp>
-        <p:nvSpPr>
           <p:cNvPr id="27" name="rec-flow-arrow">
             <a:extLst>
               <a:ext uri="{FF2B5EF4-FFF2-40B4-BE49-F238E27FC236}">
@@ -10140,6 +10329,234 @@
     <p:extLst>
       <p:ext uri="{BB962C8B-B14F-4D97-AF65-F5344CB8AC3E}">
         <p14:creationId xmlns:p14="http://schemas.microsoft.com/office/powerpoint/2010/main" val="749319062"/>
+      </p:ext>
+    </p:extLst>
+  </p:cSld>
+  <p:clrMapOvr>
+    <a:masterClrMapping/>
+  </p:clrMapOvr>
+</p:sld>
+</file>
+
+<file path=ppt/slides/slide5.xml><?xml version="1.0" encoding="utf-8"?>
+<p:sld xmlns:a="http://schemas.openxmlformats.org/drawingml/2006/main" xmlns:r="http://schemas.openxmlformats.org/officeDocument/2006/relationships" xmlns:p="http://schemas.openxmlformats.org/presentationml/2006/main">
+  <p:cSld>
+    <p:bg>
+      <p:bgPr>
+        <a:solidFill>
+          <a:srgbClr val="F7F9FC"/>
+        </a:solidFill>
+        <a:effectLst/>
+      </p:bgPr>
+    </p:bg>
+    <p:spTree>
+      <p:nvGrpSpPr>
+        <p:cNvPr id="1" name=""/>
+        <p:cNvGrpSpPr/>
+        <p:nvPr/>
+      </p:nvGrpSpPr>
+      <p:grpSpPr>
+        <a:xfrm>
+          <a:off x="0" y="0"/>
+          <a:ext cx="0" cy="0"/>
+          <a:chOff x="0" y="0"/>
+          <a:chExt cx="0" cy="0"/>
+        </a:xfrm>
+      </p:grpSpPr>
+      <p:sp>
+        <p:nvSpPr>
+          <p:cNvPr id="85" name="rec-kicker">
+            <a:extLst>
+              <a:ext uri="{FF2B5EF4-FFF2-40B4-BE49-F238E27FC236}">
+                <a16:creationId xmlns:a16="http://schemas.microsoft.com/office/drawing/2014/main" id="{9DDF72D1-8743-4843-8D64-1FDB0D738EF3}"/>
+              </a:ext>
+            </a:extLst>
+          </p:cNvPr>
+          <p:cNvSpPr>
+            <a:spLocks noGrp="1"/>
+          </p:cNvSpPr>
+          <p:nvPr/>
+        </p:nvSpPr>
+        <p:spPr>
+          <a:xfrm>
+            <a:off x="476250" y="190500"/>
+            <a:ext cx="4762500" cy="228600"/>
+          </a:xfrm>
+          <a:prstGeom prst="rect">
+            <a:avLst/>
+          </a:prstGeom>
+          <a:noFill/>
+          <a:ln w="0">
+            <a:noFill/>
+            <a:prstDash val="solid"/>
+          </a:ln>
+        </p:spPr>
+        <p:txBody>
+          <a:bodyPr/>
+          <a:lstStyle/>
+          <a:p>
+            <a:pPr algn="l">
+              <a:defRPr sz="1200" b="1">
+                <a:solidFill>
+                  <a:srgbClr val="2F62C7"/>
+                </a:solidFill>
+              </a:defRPr>
+            </a:pPr>
+            <a:r>
+              <a:rPr sz="1200" b="1">
+                <a:solidFill>
+                  <a:srgbClr val="2F62C7"/>
+                </a:solidFill>
+              </a:rPr>
+              <a:t>PROPUESTA 2 · SISTEMA DE RECOMENDACIÓN</a:t>
+            </a:r>
+          </a:p>
+        </p:txBody>
+      </p:sp>
+      <p:sp>
+        <p:nvSpPr>
+          <p:cNvPr id="2" name="rec-title">
+            <a:extLst>
+              <a:ext uri="{FF2B5EF4-FFF2-40B4-BE49-F238E27FC236}">
+                <a16:creationId xmlns:a16="http://schemas.microsoft.com/office/drawing/2014/main" id="{9079D89D-F13E-45A9-9762-F2B4F4718599}"/>
+              </a:ext>
+            </a:extLst>
+          </p:cNvPr>
+          <p:cNvSpPr>
+            <a:spLocks noGrp="1"/>
+          </p:cNvSpPr>
+          <p:nvPr/>
+        </p:nvSpPr>
+        <p:spPr>
+          <a:xfrm>
+            <a:off x="476250" y="476250"/>
+            <a:ext cx="11239500" cy="457200"/>
+          </a:xfrm>
+          <a:prstGeom prst="rect">
+            <a:avLst/>
+          </a:prstGeom>
+          <a:noFill/>
+          <a:ln w="0">
+            <a:noFill/>
+            <a:prstDash val="solid"/>
+          </a:ln>
+        </p:spPr>
+        <p:txBody>
+          <a:bodyPr/>
+          <a:lstStyle/>
+          <a:p>
+            <a:pPr algn="l">
+              <a:defRPr sz="2625" b="1">
+                <a:solidFill>
+                  <a:srgbClr val="12356B"/>
+                </a:solidFill>
+              </a:defRPr>
+            </a:pPr>
+            <a:r>
+              <a:rPr sz="2625" b="1">
+                <a:solidFill>
+                  <a:srgbClr val="12356B"/>
+                </a:solidFill>
+              </a:rPr>
+              <a:t>Recomendar productos mediante similitud entre ítems</a:t>
+            </a:r>
+          </a:p>
+        </p:txBody>
+      </p:sp>
+      <p:pic>
+        <p:nvPicPr>
+          <p:cNvPr id="1026" name="Picture 2" descr="User attachment">
+            <a:extLst>
+              <a:ext uri="{FF2B5EF4-FFF2-40B4-BE49-F238E27FC236}">
+                <a16:creationId xmlns:a16="http://schemas.microsoft.com/office/drawing/2014/main" id="{AFEE0B89-061E-404F-86FF-3618235D2204}"/>
+              </a:ext>
+            </a:extLst>
+          </p:cNvPr>
+          <p:cNvPicPr>
+            <a:picLocks noChangeAspect="1" noChangeArrowheads="1"/>
+          </p:cNvPicPr>
+          <p:nvPr/>
+        </p:nvPicPr>
+        <p:blipFill rotWithShape="1">
+          <a:blip r:embed="rId3">
+            <a:extLst>
+              <a:ext uri="{28A0092B-C50C-407E-A947-70E740481C1C}">
+                <a14:useLocalDpi xmlns:a14="http://schemas.microsoft.com/office/drawing/2010/main" val="0"/>
+              </a:ext>
+            </a:extLst>
+          </a:blip>
+          <a:srcRect b="29510"/>
+          <a:stretch/>
+        </p:blipFill>
+        <p:spPr bwMode="auto">
+          <a:xfrm>
+            <a:off x="130526" y="1066800"/>
+            <a:ext cx="4925545" cy="5698784"/>
+          </a:xfrm>
+          <a:prstGeom prst="rect">
+            <a:avLst/>
+          </a:prstGeom>
+          <a:noFill/>
+          <a:extLst>
+            <a:ext uri="{909E8E84-426E-40DD-AFC4-6F175D3DCCD1}">
+              <a14:hiddenFill xmlns:a14="http://schemas.microsoft.com/office/drawing/2010/main">
+                <a:solidFill>
+                  <a:srgbClr val="FFFFFF"/>
+                </a:solidFill>
+              </a14:hiddenFill>
+            </a:ext>
+          </a:extLst>
+        </p:spPr>
+      </p:pic>
+      <p:pic>
+        <p:nvPicPr>
+          <p:cNvPr id="1028" name="Picture 4" descr="User attachment">
+            <a:extLst>
+              <a:ext uri="{FF2B5EF4-FFF2-40B4-BE49-F238E27FC236}">
+                <a16:creationId xmlns:a16="http://schemas.microsoft.com/office/drawing/2014/main" id="{8B58185A-5F21-47F4-9E57-E18D24C065E1}"/>
+              </a:ext>
+            </a:extLst>
+          </p:cNvPr>
+          <p:cNvPicPr>
+            <a:picLocks noChangeAspect="1" noChangeArrowheads="1"/>
+          </p:cNvPicPr>
+          <p:nvPr/>
+        </p:nvPicPr>
+        <p:blipFill rotWithShape="1">
+          <a:blip r:embed="rId4">
+            <a:extLst>
+              <a:ext uri="{28A0092B-C50C-407E-A947-70E740481C1C}">
+                <a14:useLocalDpi xmlns:a14="http://schemas.microsoft.com/office/drawing/2010/main" val="0"/>
+              </a:ext>
+            </a:extLst>
+          </a:blip>
+          <a:srcRect b="29958"/>
+          <a:stretch/>
+        </p:blipFill>
+        <p:spPr bwMode="auto">
+          <a:xfrm>
+            <a:off x="5945529" y="990600"/>
+            <a:ext cx="5189316" cy="5774899"/>
+          </a:xfrm>
+          <a:prstGeom prst="rect">
+            <a:avLst/>
+          </a:prstGeom>
+          <a:noFill/>
+          <a:extLst>
+            <a:ext uri="{909E8E84-426E-40DD-AFC4-6F175D3DCCD1}">
+              <a14:hiddenFill xmlns:a14="http://schemas.microsoft.com/office/drawing/2010/main">
+                <a:solidFill>
+                  <a:srgbClr val="FFFFFF"/>
+                </a:solidFill>
+              </a14:hiddenFill>
+            </a:ext>
+          </a:extLst>
+        </p:spPr>
+      </p:pic>
+    </p:spTree>
+    <p:extLst>
+      <p:ext uri="{BB962C8B-B14F-4D97-AF65-F5344CB8AC3E}">
+        <p14:creationId xmlns:p14="http://schemas.microsoft.com/office/powerpoint/2010/main" val="2855660967"/>
       </p:ext>
     </p:extLst>
   </p:cSld>
